--- a/resources/slides/DL2_Intro to CZ ID.pptx
+++ b/resources/slides/DL2_Intro to CZ ID.pptx
@@ -6,55 +6,59 @@
     <p:sldMasterId id="2147483661" r:id="rId2"/>
   </p:sldMasterIdLst>
   <p:notesMasterIdLst>
-    <p:notesMasterId r:id="rId18"/>
+    <p:notesMasterId r:id="rId22"/>
   </p:notesMasterIdLst>
   <p:sldIdLst>
-    <p:sldId id="256" r:id="rId3"/>
-    <p:sldId id="257" r:id="rId4"/>
-    <p:sldId id="258" r:id="rId5"/>
-    <p:sldId id="259" r:id="rId6"/>
-    <p:sldId id="260" r:id="rId7"/>
-    <p:sldId id="261" r:id="rId8"/>
-    <p:sldId id="262" r:id="rId9"/>
-    <p:sldId id="263" r:id="rId10"/>
-    <p:sldId id="264" r:id="rId11"/>
-    <p:sldId id="265" r:id="rId12"/>
-    <p:sldId id="266" r:id="rId13"/>
-    <p:sldId id="267" r:id="rId14"/>
-    <p:sldId id="268" r:id="rId15"/>
-    <p:sldId id="269" r:id="rId16"/>
-    <p:sldId id="270" r:id="rId17"/>
+    <p:sldId id="275" r:id="rId3"/>
+    <p:sldId id="256" r:id="rId4"/>
+    <p:sldId id="257" r:id="rId5"/>
+    <p:sldId id="258" r:id="rId6"/>
+    <p:sldId id="259" r:id="rId7"/>
+    <p:sldId id="260" r:id="rId8"/>
+    <p:sldId id="274" r:id="rId9"/>
+    <p:sldId id="261" r:id="rId10"/>
+    <p:sldId id="262" r:id="rId11"/>
+    <p:sldId id="263" r:id="rId12"/>
+    <p:sldId id="264" r:id="rId13"/>
+    <p:sldId id="265" r:id="rId14"/>
+    <p:sldId id="266" r:id="rId15"/>
+    <p:sldId id="267" r:id="rId16"/>
+    <p:sldId id="268" r:id="rId17"/>
+    <p:sldId id="269" r:id="rId18"/>
+    <p:sldId id="272" r:id="rId19"/>
+    <p:sldId id="273" r:id="rId20"/>
+    <p:sldId id="270" r:id="rId21"/>
   </p:sldIdLst>
   <p:sldSz cx="9144000" cy="5143500" type="screen16x9"/>
   <p:notesSz cx="6858000" cy="9144000"/>
   <p:embeddedFontLst>
     <p:embeddedFont>
       <p:font typeface="Lato" panose="020F0502020204030203" pitchFamily="34" charset="0"/>
-      <p:regular r:id="rId19"/>
-      <p:bold r:id="rId20"/>
-      <p:italic r:id="rId21"/>
-      <p:boldItalic r:id="rId22"/>
-    </p:embeddedFont>
-    <p:embeddedFont>
-      <p:font typeface="Open Sans" panose="020B0606030504020204" pitchFamily="34" charset="0"/>
       <p:regular r:id="rId23"/>
       <p:bold r:id="rId24"/>
       <p:italic r:id="rId25"/>
       <p:boldItalic r:id="rId26"/>
     </p:embeddedFont>
     <p:embeddedFont>
-      <p:font typeface="Poppins" pitchFamily="2" charset="77"/>
+      <p:font typeface="Open Sans" panose="020B0606030504020204" pitchFamily="34" charset="0"/>
       <p:regular r:id="rId27"/>
       <p:bold r:id="rId28"/>
       <p:italic r:id="rId29"/>
       <p:boldItalic r:id="rId30"/>
     </p:embeddedFont>
     <p:embeddedFont>
-      <p:font typeface="Roboto" panose="02000000000000000000" pitchFamily="2" charset="0"/>
+      <p:font typeface="Poppins" pitchFamily="2" charset="77"/>
       <p:regular r:id="rId31"/>
       <p:bold r:id="rId32"/>
       <p:italic r:id="rId33"/>
       <p:boldItalic r:id="rId34"/>
+    </p:embeddedFont>
+    <p:embeddedFont>
+      <p:font typeface="Roboto" panose="02000000000000000000" pitchFamily="2" charset="0"/>
+      <p:regular r:id="rId35"/>
+      <p:bold r:id="rId36"/>
+      <p:italic r:id="rId37"/>
+      <p:boldItalic r:id="rId38"/>
     </p:embeddedFont>
   </p:embeddedFontLst>
   <p:defaultTextStyle>
@@ -302,7 +306,7 @@
       </p15:sldGuideLst>
     </p:ext>
     <p:ext uri="GoogleSlidesCustomDataVersion2">
-      <go:slidesCustomData xmlns:go="http://customooxmlschemas.google.com/" xmlns:ahyp="http://schemas.microsoft.com/office/drawing/2018/hyperlinkcolor" xmlns:p15="http://schemas.microsoft.com/office/powerpoint/2012/main" xmlns:p14="http://schemas.microsoft.com/office/powerpoint/2010/main" xmlns:com="http://schemas.openxmlformats.org/drawingml/2006/compatibility" xmlns:pvml="urn:schemas-microsoft-com:office:powerpoint" xmlns:v="urn:schemas-microsoft-com:vml" xmlns:o="urn:schemas-microsoft-com:office:office" xmlns:dgm="http://schemas.openxmlformats.org/drawingml/2006/diagram" xmlns:c="http://schemas.openxmlformats.org/drawingml/2006/chart" xmlns:mv="urn:schemas-microsoft-com:mac:vml" xmlns:mc="http://schemas.openxmlformats.org/markup-compatibility/2006" xmlns="" r:id="rId42" roundtripDataSignature="AMtx7mhpXceUUEMsw+K931peaSFJ0fXVOw=="/>
+      <go:slidesCustomData xmlns="" xmlns:mc="http://schemas.openxmlformats.org/markup-compatibility/2006" xmlns:mv="urn:schemas-microsoft-com:mac:vml" xmlns:c="http://schemas.openxmlformats.org/drawingml/2006/chart" xmlns:dgm="http://schemas.openxmlformats.org/drawingml/2006/diagram" xmlns:o="urn:schemas-microsoft-com:office:office" xmlns:v="urn:schemas-microsoft-com:vml" xmlns:pvml="urn:schemas-microsoft-com:office:powerpoint" xmlns:com="http://schemas.openxmlformats.org/drawingml/2006/compatibility" xmlns:p14="http://schemas.microsoft.com/office/powerpoint/2010/main" xmlns:p15="http://schemas.microsoft.com/office/powerpoint/2012/main" xmlns:ahyp="http://schemas.microsoft.com/office/drawing/2018/hyperlinkcolor" xmlns:go="http://customooxmlschemas.google.com/" r:id="rId42" roundtripDataSignature="AMtx7mhpXceUUEMsw+K931peaSFJ0fXVOw=="/>
     </p:ext>
   </p:extLst>
 </p:presentation>
@@ -944,10 +948,14 @@
               <a:buNone/>
             </a:pPr>
             <a:r>
+              <a:rPr lang="en" dirty="0"/>
+              <a:t>Slides </a:t>
+            </a:r>
+            <a:r>
               <a:rPr lang="en"/>
-              <a:t>Slides updated 07/02/2024</a:t>
+              <a:t>updated 09/2026</a:t>
             </a:r>
-            <a:endParaRPr/>
+            <a:endParaRPr dirty="0"/>
           </a:p>
         </p:txBody>
       </p:sp>
@@ -1209,7 +1217,7 @@
         </p:nvSpPr>
         <p:spPr>
           <a:xfrm>
-            <a:off x="381300" y="685800"/>
+            <a:off x="381000" y="685800"/>
             <a:ext cx="6096000" cy="3429000"/>
           </a:xfrm>
           <a:custGeom>
@@ -1628,7 +1636,7 @@
         </p:nvSpPr>
         <p:spPr>
           <a:xfrm>
-            <a:off x="381300" y="685800"/>
+            <a:off x="381000" y="685800"/>
             <a:ext cx="6096000" cy="3429000"/>
           </a:xfrm>
           <a:custGeom>
@@ -1750,7 +1758,7 @@
         </p:nvSpPr>
         <p:spPr>
           <a:xfrm>
-            <a:off x="381300" y="685800"/>
+            <a:off x="381000" y="685800"/>
             <a:ext cx="6096000" cy="3429000"/>
           </a:xfrm>
           <a:custGeom>
@@ -1848,6 +1856,250 @@
   <p:cSld>
     <p:spTree>
       <p:nvGrpSpPr>
+        <p:cNvPr id="1" name="Shape 88"/>
+        <p:cNvGrpSpPr/>
+        <p:nvPr/>
+      </p:nvGrpSpPr>
+      <p:grpSpPr>
+        <a:xfrm>
+          <a:off x="0" y="0"/>
+          <a:ext cx="0" cy="0"/>
+          <a:chOff x="0" y="0"/>
+          <a:chExt cx="0" cy="0"/>
+        </a:xfrm>
+      </p:grpSpPr>
+      <p:sp>
+        <p:nvSpPr>
+          <p:cNvPr id="89" name="Google Shape;89;p6:notes"/>
+          <p:cNvSpPr>
+            <a:spLocks noGrp="1" noRot="1" noChangeAspect="1"/>
+          </p:cNvSpPr>
+          <p:nvPr>
+            <p:ph type="sldImg" idx="2"/>
+          </p:nvPr>
+        </p:nvSpPr>
+        <p:spPr>
+          <a:xfrm>
+            <a:off x="381000" y="685800"/>
+            <a:ext cx="6096000" cy="3429000"/>
+          </a:xfrm>
+          <a:custGeom>
+            <a:avLst/>
+            <a:gdLst/>
+            <a:ahLst/>
+            <a:cxnLst/>
+            <a:rect l="l" t="t" r="r" b="b"/>
+            <a:pathLst>
+              <a:path w="120000" h="120000" extrusionOk="0">
+                <a:moveTo>
+                  <a:pt x="0" y="0"/>
+                </a:moveTo>
+                <a:lnTo>
+                  <a:pt x="120000" y="0"/>
+                </a:lnTo>
+                <a:lnTo>
+                  <a:pt x="120000" y="120000"/>
+                </a:lnTo>
+                <a:lnTo>
+                  <a:pt x="0" y="120000"/>
+                </a:lnTo>
+                <a:close/>
+              </a:path>
+            </a:pathLst>
+          </a:custGeom>
+          <a:noFill/>
+          <a:ln w="9525" cap="flat" cmpd="sng">
+            <a:solidFill>
+              <a:srgbClr val="000000"/>
+            </a:solidFill>
+            <a:prstDash val="solid"/>
+            <a:round/>
+            <a:headEnd type="none" w="sm" len="sm"/>
+            <a:tailEnd type="none" w="sm" len="sm"/>
+          </a:ln>
+        </p:spPr>
+      </p:sp>
+      <p:sp>
+        <p:nvSpPr>
+          <p:cNvPr id="90" name="Google Shape;90;p6:notes"/>
+          <p:cNvSpPr txBox="1">
+            <a:spLocks noGrp="1"/>
+          </p:cNvSpPr>
+          <p:nvPr>
+            <p:ph type="body" idx="1"/>
+          </p:nvPr>
+        </p:nvSpPr>
+        <p:spPr>
+          <a:xfrm>
+            <a:off x="685800" y="4343400"/>
+            <a:ext cx="5486400" cy="4114800"/>
+          </a:xfrm>
+          <a:prstGeom prst="rect">
+            <a:avLst/>
+          </a:prstGeom>
+          <a:noFill/>
+          <a:ln>
+            <a:noFill/>
+          </a:ln>
+        </p:spPr>
+        <p:txBody>
+          <a:bodyPr spcFirstLastPara="1" wrap="square" lIns="91425" tIns="91425" rIns="91425" bIns="91425" anchor="t" anchorCtr="0">
+            <a:noAutofit/>
+          </a:bodyPr>
+          <a:lstStyle/>
+          <a:p>
+            <a:pPr marL="0" lvl="0" indent="0" algn="l" rtl="0">
+              <a:lnSpc>
+                <a:spcPct val="100000"/>
+              </a:lnSpc>
+              <a:spcBef>
+                <a:spcPts val="0"/>
+              </a:spcBef>
+              <a:spcAft>
+                <a:spcPts val="0"/>
+              </a:spcAft>
+              <a:buSzPts val="1100"/>
+              <a:buNone/>
+            </a:pPr>
+            <a:endParaRPr/>
+          </a:p>
+        </p:txBody>
+      </p:sp>
+    </p:spTree>
+  </p:cSld>
+  <p:clrMapOvr>
+    <a:masterClrMapping/>
+  </p:clrMapOvr>
+</p:notes>
+</file>
+
+<file path=ppt/notesSlides/notesSlide16.xml><?xml version="1.0" encoding="utf-8"?>
+<p:notes xmlns:a="http://schemas.openxmlformats.org/drawingml/2006/main" xmlns:r="http://schemas.openxmlformats.org/officeDocument/2006/relationships" xmlns:p="http://schemas.openxmlformats.org/presentationml/2006/main" showMasterSp="0" showMasterPhAnim="0">
+  <p:cSld>
+    <p:spTree>
+      <p:nvGrpSpPr>
+        <p:cNvPr id="1" name="Shape 94"/>
+        <p:cNvGrpSpPr/>
+        <p:nvPr/>
+      </p:nvGrpSpPr>
+      <p:grpSpPr>
+        <a:xfrm>
+          <a:off x="0" y="0"/>
+          <a:ext cx="0" cy="0"/>
+          <a:chOff x="0" y="0"/>
+          <a:chExt cx="0" cy="0"/>
+        </a:xfrm>
+      </p:grpSpPr>
+      <p:sp>
+        <p:nvSpPr>
+          <p:cNvPr id="95" name="Google Shape;95;g2e31309483e_0_2:notes"/>
+          <p:cNvSpPr>
+            <a:spLocks noGrp="1" noRot="1" noChangeAspect="1"/>
+          </p:cNvSpPr>
+          <p:nvPr>
+            <p:ph type="sldImg" idx="2"/>
+          </p:nvPr>
+        </p:nvSpPr>
+        <p:spPr>
+          <a:xfrm>
+            <a:off x="381000" y="685800"/>
+            <a:ext cx="6096000" cy="3429000"/>
+          </a:xfrm>
+          <a:custGeom>
+            <a:avLst/>
+            <a:gdLst/>
+            <a:ahLst/>
+            <a:cxnLst/>
+            <a:rect l="l" t="t" r="r" b="b"/>
+            <a:pathLst>
+              <a:path w="120000" h="120000" extrusionOk="0">
+                <a:moveTo>
+                  <a:pt x="0" y="0"/>
+                </a:moveTo>
+                <a:lnTo>
+                  <a:pt x="120000" y="0"/>
+                </a:lnTo>
+                <a:lnTo>
+                  <a:pt x="120000" y="120000"/>
+                </a:lnTo>
+                <a:lnTo>
+                  <a:pt x="0" y="120000"/>
+                </a:lnTo>
+                <a:close/>
+              </a:path>
+            </a:pathLst>
+          </a:custGeom>
+          <a:noFill/>
+          <a:ln w="9525" cap="flat" cmpd="sng">
+            <a:solidFill>
+              <a:srgbClr val="000000"/>
+            </a:solidFill>
+            <a:prstDash val="solid"/>
+            <a:round/>
+            <a:headEnd type="none" w="sm" len="sm"/>
+            <a:tailEnd type="none" w="sm" len="sm"/>
+          </a:ln>
+        </p:spPr>
+      </p:sp>
+      <p:sp>
+        <p:nvSpPr>
+          <p:cNvPr id="96" name="Google Shape;96;g2e31309483e_0_2:notes"/>
+          <p:cNvSpPr txBox="1">
+            <a:spLocks noGrp="1"/>
+          </p:cNvSpPr>
+          <p:nvPr>
+            <p:ph type="body" idx="1"/>
+          </p:nvPr>
+        </p:nvSpPr>
+        <p:spPr>
+          <a:xfrm>
+            <a:off x="685800" y="4343400"/>
+            <a:ext cx="5486400" cy="4114800"/>
+          </a:xfrm>
+          <a:prstGeom prst="rect">
+            <a:avLst/>
+          </a:prstGeom>
+          <a:noFill/>
+          <a:ln>
+            <a:noFill/>
+          </a:ln>
+        </p:spPr>
+        <p:txBody>
+          <a:bodyPr spcFirstLastPara="1" wrap="square" lIns="91425" tIns="91425" rIns="91425" bIns="91425" anchor="t" anchorCtr="0">
+            <a:noAutofit/>
+          </a:bodyPr>
+          <a:lstStyle/>
+          <a:p>
+            <a:pPr marL="0" lvl="0" indent="0" algn="l" rtl="0">
+              <a:lnSpc>
+                <a:spcPct val="100000"/>
+              </a:lnSpc>
+              <a:spcBef>
+                <a:spcPts val="0"/>
+              </a:spcBef>
+              <a:spcAft>
+                <a:spcPts val="0"/>
+              </a:spcAft>
+              <a:buSzPts val="1100"/>
+              <a:buNone/>
+            </a:pPr>
+            <a:endParaRPr/>
+          </a:p>
+        </p:txBody>
+      </p:sp>
+    </p:spTree>
+  </p:cSld>
+  <p:clrMapOvr>
+    <a:masterClrMapping/>
+  </p:clrMapOvr>
+</p:notes>
+</file>
+
+<file path=ppt/notesSlides/notesSlide17.xml><?xml version="1.0" encoding="utf-8"?>
+<p:notes xmlns:a="http://schemas.openxmlformats.org/drawingml/2006/main" xmlns:r="http://schemas.openxmlformats.org/officeDocument/2006/relationships" xmlns:p="http://schemas.openxmlformats.org/presentationml/2006/main" showMasterSp="0" showMasterPhAnim="0">
+  <p:cSld>
+    <p:spTree>
+      <p:nvGrpSpPr>
         <p:cNvPr id="1" name="Shape 228"/>
         <p:cNvGrpSpPr/>
         <p:nvPr/>
@@ -1872,7 +2124,7 @@
         </p:nvSpPr>
         <p:spPr>
           <a:xfrm>
-            <a:off x="381300" y="685800"/>
+            <a:off x="381000" y="685800"/>
             <a:ext cx="6096000" cy="3429000"/>
           </a:xfrm>
           <a:custGeom>
@@ -2375,7 +2627,7 @@
         </p:nvSpPr>
         <p:spPr>
           <a:xfrm>
-            <a:off x="381300" y="685800"/>
+            <a:off x="381000" y="685800"/>
             <a:ext cx="6096000" cy="3429000"/>
           </a:xfrm>
           <a:custGeom>
@@ -2497,7 +2749,7 @@
         </p:nvSpPr>
         <p:spPr>
           <a:xfrm>
-            <a:off x="381300" y="685800"/>
+            <a:off x="381000" y="685800"/>
             <a:ext cx="6096000" cy="3429000"/>
           </a:xfrm>
           <a:custGeom>
@@ -2619,7 +2871,7 @@
         </p:nvSpPr>
         <p:spPr>
           <a:xfrm>
-            <a:off x="381300" y="685800"/>
+            <a:off x="381000" y="685800"/>
             <a:ext cx="6096000" cy="3429000"/>
           </a:xfrm>
           <a:custGeom>
@@ -22027,7 +22279,7 @@
   <p:cSld>
     <p:spTree>
       <p:nvGrpSpPr>
-        <p:cNvPr id="1" name="Shape 122"/>
+        <p:cNvPr id="1" name=""/>
         <p:cNvGrpSpPr/>
         <p:nvPr/>
       </p:nvGrpSpPr>
@@ -22039,44 +22291,188 @@
           <a:chExt cx="0" cy="0"/>
         </a:xfrm>
       </p:grpSpPr>
-      <p:cxnSp>
-        <p:nvCxnSpPr>
-          <p:cNvPr id="123" name="Google Shape;123;p1"/>
-          <p:cNvCxnSpPr/>
-          <p:nvPr/>
-        </p:nvCxnSpPr>
-        <p:spPr>
-          <a:xfrm>
-            <a:off x="476250" y="2428875"/>
-            <a:ext cx="8191500" cy="0"/>
-          </a:xfrm>
-          <a:prstGeom prst="straightConnector1">
-            <a:avLst/>
-          </a:prstGeom>
-          <a:noFill/>
-          <a:ln w="28575" cap="flat" cmpd="sng">
-            <a:solidFill>
-              <a:srgbClr val="E3EED3">
-                <a:alpha val="40000"/>
-              </a:srgbClr>
-            </a:solidFill>
-            <a:prstDash val="solid"/>
-            <a:miter lim="400000"/>
-            <a:headEnd type="none" w="sm" len="sm"/>
-            <a:tailEnd type="none" w="sm" len="sm"/>
-          </a:ln>
-        </p:spPr>
-      </p:cxnSp>
       <p:sp>
         <p:nvSpPr>
-          <p:cNvPr id="124" name="Google Shape;124;p1"/>
-          <p:cNvSpPr txBox="1"/>
-          <p:nvPr/>
+          <p:cNvPr id="2" name="Title 1">
+            <a:extLst>
+              <a:ext uri="{FF2B5EF4-FFF2-40B4-BE49-F238E27FC236}">
+                <a16:creationId xmlns:a16="http://schemas.microsoft.com/office/drawing/2014/main" id="{3C95666F-18C3-77BE-CFE4-B6F66F44E8AD}"/>
+              </a:ext>
+            </a:extLst>
+          </p:cNvPr>
+          <p:cNvSpPr>
+            <a:spLocks noGrp="1"/>
+          </p:cNvSpPr>
+          <p:nvPr>
+            <p:ph type="title"/>
+          </p:nvPr>
+        </p:nvSpPr>
+        <p:spPr/>
+        <p:txBody>
+          <a:bodyPr>
+            <a:normAutofit fontScale="90000"/>
+          </a:bodyPr>
+          <a:lstStyle/>
+          <a:p>
+            <a:r>
+              <a:rPr lang="en-US" dirty="0">
+                <a:latin typeface="+mj-lt"/>
+                <a:ea typeface="Open Sans" panose="020B0606030504020204" pitchFamily="34" charset="0"/>
+                <a:cs typeface="Open Sans" panose="020B0606030504020204" pitchFamily="34" charset="0"/>
+              </a:rPr>
+              <a:t>Disclaimer</a:t>
+            </a:r>
+          </a:p>
+        </p:txBody>
+      </p:sp>
+      <p:sp>
+        <p:nvSpPr>
+          <p:cNvPr id="4" name="Text Placeholder 3">
+            <a:extLst>
+              <a:ext uri="{FF2B5EF4-FFF2-40B4-BE49-F238E27FC236}">
+                <a16:creationId xmlns:a16="http://schemas.microsoft.com/office/drawing/2014/main" id="{9BF250D0-5ADA-57BD-3F25-93C692767584}"/>
+              </a:ext>
+            </a:extLst>
+          </p:cNvPr>
+          <p:cNvSpPr>
+            <a:spLocks noGrp="1"/>
+          </p:cNvSpPr>
+          <p:nvPr>
+            <p:ph type="body" idx="1"/>
+          </p:nvPr>
+        </p:nvSpPr>
+        <p:spPr/>
+        <p:txBody>
+          <a:bodyPr>
+            <a:normAutofit/>
+          </a:bodyPr>
+          <a:lstStyle/>
+          <a:p>
+            <a:r>
+              <a:rPr lang="en-US" dirty="0">
+                <a:solidFill>
+                  <a:schemeClr val="tx1"/>
+                </a:solidFill>
+              </a:rPr>
+              <a:t>This training resource was developed to be used with the CZ ID platform</a:t>
+            </a:r>
+          </a:p>
+          <a:p>
+            <a:r>
+              <a:rPr lang="en-US" dirty="0">
+                <a:solidFill>
+                  <a:schemeClr val="tx1"/>
+                </a:solidFill>
+              </a:rPr>
+              <a:t>In October, 2026, stewardship of CZ ID transitioned to UCSF and the platform was renamed to </a:t>
+            </a:r>
+            <a:r>
+              <a:rPr lang="en-US" dirty="0" err="1">
+                <a:solidFill>
+                  <a:schemeClr val="tx1"/>
+                </a:solidFill>
+              </a:rPr>
+              <a:t>SeqtoID</a:t>
+            </a:r>
+            <a:endParaRPr lang="en-US" dirty="0">
+              <a:solidFill>
+                <a:schemeClr val="tx1"/>
+              </a:solidFill>
+            </a:endParaRPr>
+          </a:p>
+          <a:p>
+            <a:r>
+              <a:rPr lang="en-US">
+                <a:solidFill>
+                  <a:schemeClr val="tx1"/>
+                </a:solidFill>
+              </a:rPr>
+              <a:t>These </a:t>
+            </a:r>
+            <a:r>
+              <a:rPr lang="en-US" dirty="0">
+                <a:solidFill>
+                  <a:schemeClr val="tx1"/>
+                </a:solidFill>
+              </a:rPr>
+              <a:t>training materials are not being actively maintained and may not reflect differences between CZ ID and </a:t>
+            </a:r>
+            <a:r>
+              <a:rPr lang="en-US" dirty="0" err="1">
+                <a:solidFill>
+                  <a:schemeClr val="tx1"/>
+                </a:solidFill>
+              </a:rPr>
+              <a:t>SeqtoID</a:t>
+            </a:r>
+            <a:r>
+              <a:rPr lang="en-US" dirty="0">
+                <a:solidFill>
+                  <a:schemeClr val="tx1"/>
+                </a:solidFill>
+              </a:rPr>
+              <a:t>, subsequent changes to the platform, or current methods and best practices in metagenomic sequencing </a:t>
+            </a:r>
+            <a:r>
+              <a:rPr lang="en-US">
+                <a:solidFill>
+                  <a:schemeClr val="tx1"/>
+                </a:solidFill>
+              </a:rPr>
+              <a:t>and analysis</a:t>
+            </a:r>
+            <a:endParaRPr lang="en-US" dirty="0">
+              <a:solidFill>
+                <a:schemeClr val="tx1"/>
+              </a:solidFill>
+            </a:endParaRPr>
+          </a:p>
+        </p:txBody>
+      </p:sp>
+    </p:spTree>
+    <p:extLst>
+      <p:ext uri="{BB962C8B-B14F-4D97-AF65-F5344CB8AC3E}">
+        <p14:creationId xmlns:p14="http://schemas.microsoft.com/office/powerpoint/2010/main" val="823624222"/>
+      </p:ext>
+    </p:extLst>
+  </p:cSld>
+  <p:clrMapOvr>
+    <a:masterClrMapping/>
+  </p:clrMapOvr>
+</p:sld>
+</file>
+
+<file path=ppt/slides/slide10.xml><?xml version="1.0" encoding="utf-8"?>
+<p:sld xmlns:a="http://schemas.openxmlformats.org/drawingml/2006/main" xmlns:r="http://schemas.openxmlformats.org/officeDocument/2006/relationships" xmlns:p="http://schemas.openxmlformats.org/presentationml/2006/main">
+  <p:cSld>
+    <p:spTree>
+      <p:nvGrpSpPr>
+        <p:cNvPr id="1" name="Shape 183"/>
+        <p:cNvGrpSpPr/>
+        <p:nvPr/>
+      </p:nvGrpSpPr>
+      <p:grpSpPr>
+        <a:xfrm>
+          <a:off x="0" y="0"/>
+          <a:ext cx="0" cy="0"/>
+          <a:chOff x="0" y="0"/>
+          <a:chExt cx="0" cy="0"/>
+        </a:xfrm>
+      </p:grpSpPr>
+      <p:sp>
+        <p:nvSpPr>
+          <p:cNvPr id="184" name="Google Shape;184;p8"/>
+          <p:cNvSpPr txBox="1">
+            <a:spLocks noGrp="1"/>
+          </p:cNvSpPr>
+          <p:nvPr>
+            <p:ph type="title" idx="4294967295"/>
+          </p:nvPr>
         </p:nvSpPr>
         <p:spPr>
           <a:xfrm>
-            <a:off x="476255" y="2523600"/>
-            <a:ext cx="8191500" cy="410700"/>
+            <a:off x="342900" y="259225"/>
+            <a:ext cx="8392800" cy="726600"/>
           </a:xfrm>
           <a:prstGeom prst="rect">
             <a:avLst/>
@@ -22087,45 +22483,35 @@
           </a:ln>
         </p:spPr>
         <p:txBody>
-          <a:bodyPr spcFirstLastPara="1" wrap="square" lIns="19050" tIns="19050" rIns="19050" bIns="19050" anchor="ctr" anchorCtr="0">
+          <a:bodyPr spcFirstLastPara="1" wrap="square" lIns="68575" tIns="34275" rIns="68575" bIns="34275" anchor="ctr" anchorCtr="0">
             <a:noAutofit/>
           </a:bodyPr>
           <a:lstStyle/>
           <a:p>
-            <a:pPr marL="0" marR="0" lvl="0" indent="0" algn="l" rtl="0">
-              <a:lnSpc>
-                <a:spcPct val="120000"/>
-              </a:lnSpc>
-              <a:spcBef>
-                <a:spcPts val="0"/>
-              </a:spcBef>
-              <a:spcAft>
-                <a:spcPts val="0"/>
-              </a:spcAft>
-              <a:buClr>
-                <a:srgbClr val="9DC061"/>
-              </a:buClr>
-              <a:buSzPts val="2300"/>
-              <a:buFont typeface="Poppins"/>
+            <a:pPr marL="0" lvl="0" indent="0" algn="ctr" rtl="0">
+              <a:lnSpc>
+                <a:spcPct val="90000"/>
+              </a:lnSpc>
+              <a:spcBef>
+                <a:spcPts val="0"/>
+              </a:spcBef>
+              <a:spcAft>
+                <a:spcPts val="0"/>
+              </a:spcAft>
+              <a:buSzPts val="3300"/>
               <a:buNone/>
             </a:pPr>
             <a:r>
-              <a:rPr lang="en" sz="1800" b="0" i="0" u="none" strike="noStrike" cap="none">
-                <a:solidFill>
-                  <a:schemeClr val="dk1"/>
-                </a:solidFill>
-                <a:latin typeface="Open Sans"/>
+              <a:rPr lang="en" sz="2500">
+                <a:latin typeface="+mj-lt"/>
                 <a:ea typeface="Open Sans"/>
                 <a:cs typeface="Open Sans"/>
                 <a:sym typeface="Open Sans"/>
               </a:rPr>
-              <a:t>Introduction to CZ ID</a:t>
+              <a:t>Perform QC</a:t>
             </a:r>
-            <a:endParaRPr sz="1800" b="0" i="0" u="none" strike="noStrike" cap="none">
-              <a:solidFill>
-                <a:schemeClr val="dk1"/>
-              </a:solidFill>
-              <a:latin typeface="Open Sans"/>
+            <a:endParaRPr sz="2500">
+              <a:latin typeface="+mj-lt"/>
               <a:ea typeface="Open Sans"/>
               <a:cs typeface="Open Sans"/>
               <a:sym typeface="Open Sans"/>
@@ -22135,7 +22521,7 @@
       </p:sp>
       <p:pic>
         <p:nvPicPr>
-          <p:cNvPr id="126" name="Google Shape;126;p1"/>
+          <p:cNvPr id="185" name="Google Shape;185;p8"/>
           <p:cNvPicPr preferRelativeResize="0"/>
           <p:nvPr/>
         </p:nvPicPr>
@@ -22143,13 +22529,13 @@
           <a:blip r:embed="rId3">
             <a:alphaModFix/>
           </a:blip>
-          <a:srcRect/>
+          <a:srcRect l="2771" t="22630" r="4213"/>
           <a:stretch/>
         </p:blipFill>
         <p:spPr>
           <a:xfrm>
-            <a:off x="481108" y="1367375"/>
-            <a:ext cx="2960717" cy="966775"/>
+            <a:off x="924925" y="1367175"/>
+            <a:ext cx="7202499" cy="3007076"/>
           </a:xfrm>
           <a:prstGeom prst="rect">
             <a:avLst/>
@@ -22157,6 +22543,131 @@
           <a:noFill/>
           <a:ln>
             <a:noFill/>
+          </a:ln>
+          <a:effectLst>
+            <a:outerShdw blurRad="57150" dist="19050" dir="5400000" algn="bl" rotWithShape="0">
+              <a:srgbClr val="000000">
+                <a:alpha val="49019"/>
+              </a:srgbClr>
+            </a:outerShdw>
+          </a:effectLst>
+        </p:spPr>
+      </p:pic>
+    </p:spTree>
+  </p:cSld>
+  <p:clrMapOvr>
+    <a:masterClrMapping/>
+  </p:clrMapOvr>
+</p:sld>
+</file>
+
+<file path=ppt/slides/slide11.xml><?xml version="1.0" encoding="utf-8"?>
+<p:sld xmlns:a="http://schemas.openxmlformats.org/drawingml/2006/main" xmlns:r="http://schemas.openxmlformats.org/officeDocument/2006/relationships" xmlns:p="http://schemas.openxmlformats.org/presentationml/2006/main">
+  <p:cSld>
+    <p:spTree>
+      <p:nvGrpSpPr>
+        <p:cNvPr id="1" name="Shape 189"/>
+        <p:cNvGrpSpPr/>
+        <p:nvPr/>
+      </p:nvGrpSpPr>
+      <p:grpSpPr>
+        <a:xfrm>
+          <a:off x="0" y="0"/>
+          <a:ext cx="0" cy="0"/>
+          <a:chOff x="0" y="0"/>
+          <a:chExt cx="0" cy="0"/>
+        </a:xfrm>
+      </p:grpSpPr>
+      <p:sp>
+        <p:nvSpPr>
+          <p:cNvPr id="190" name="Google Shape;190;p9"/>
+          <p:cNvSpPr txBox="1">
+            <a:spLocks noGrp="1"/>
+          </p:cNvSpPr>
+          <p:nvPr>
+            <p:ph type="title" idx="4294967295"/>
+          </p:nvPr>
+        </p:nvSpPr>
+        <p:spPr>
+          <a:xfrm>
+            <a:off x="342899" y="254235"/>
+            <a:ext cx="8479800" cy="690000"/>
+          </a:xfrm>
+          <a:prstGeom prst="rect">
+            <a:avLst/>
+          </a:prstGeom>
+          <a:noFill/>
+          <a:ln>
+            <a:noFill/>
+          </a:ln>
+        </p:spPr>
+        <p:txBody>
+          <a:bodyPr spcFirstLastPara="1" wrap="square" lIns="68575" tIns="34275" rIns="68575" bIns="34275" anchor="ctr" anchorCtr="0">
+            <a:noAutofit/>
+          </a:bodyPr>
+          <a:lstStyle/>
+          <a:p>
+            <a:pPr marL="0" lvl="0" indent="0" algn="ctr" rtl="0">
+              <a:lnSpc>
+                <a:spcPct val="90000"/>
+              </a:lnSpc>
+              <a:spcBef>
+                <a:spcPts val="0"/>
+              </a:spcBef>
+              <a:spcAft>
+                <a:spcPts val="0"/>
+              </a:spcAft>
+              <a:buSzPts val="3300"/>
+              <a:buNone/>
+            </a:pPr>
+            <a:r>
+              <a:rPr lang="en" sz="2500">
+                <a:latin typeface="+mj-lt"/>
+                <a:ea typeface="Open Sans"/>
+                <a:cs typeface="Open Sans"/>
+                <a:sym typeface="Open Sans"/>
+              </a:rPr>
+              <a:t>Explore and evaluate metrics for detected microbes</a:t>
+            </a:r>
+            <a:endParaRPr sz="2500">
+              <a:latin typeface="+mj-lt"/>
+              <a:ea typeface="Open Sans"/>
+              <a:cs typeface="Open Sans"/>
+              <a:sym typeface="Open Sans"/>
+            </a:endParaRPr>
+          </a:p>
+        </p:txBody>
+      </p:sp>
+      <p:pic>
+        <p:nvPicPr>
+          <p:cNvPr id="191" name="Google Shape;191;p9"/>
+          <p:cNvPicPr preferRelativeResize="0"/>
+          <p:nvPr/>
+        </p:nvPicPr>
+        <p:blipFill rotWithShape="1">
+          <a:blip r:embed="rId3">
+            <a:alphaModFix/>
+          </a:blip>
+          <a:srcRect t="1758"/>
+          <a:stretch/>
+        </p:blipFill>
+        <p:spPr>
+          <a:xfrm>
+            <a:off x="152400" y="1158200"/>
+            <a:ext cx="8839199" cy="3443051"/>
+          </a:xfrm>
+          <a:prstGeom prst="rect">
+            <a:avLst/>
+          </a:prstGeom>
+          <a:noFill/>
+          <a:ln w="9525" cap="flat" cmpd="sng">
+            <a:solidFill>
+              <a:schemeClr val="dk2"/>
+            </a:solidFill>
+            <a:prstDash val="solid"/>
+            <a:round/>
+            <a:headEnd type="none" w="sm" len="sm"/>
+            <a:tailEnd type="none" w="sm" len="sm"/>
           </a:ln>
         </p:spPr>
       </p:pic>
@@ -22168,7 +22679,7 @@
 </p:sld>
 </file>
 
-<file path=ppt/slides/slide10.xml><?xml version="1.0" encoding="utf-8"?>
+<file path=ppt/slides/slide12.xml><?xml version="1.0" encoding="utf-8"?>
 <p:sld xmlns:a="http://schemas.openxmlformats.org/drawingml/2006/main" xmlns:r="http://schemas.openxmlformats.org/officeDocument/2006/relationships" xmlns:p="http://schemas.openxmlformats.org/presentationml/2006/main">
   <p:cSld>
     <p:spTree>
@@ -22255,7 +22766,7 @@
               <a:buNone/>
             </a:pPr>
             <a:r>
-              <a:rPr lang="en" sz="2400" b="0" i="0" u="none" strike="noStrike" cap="none">
+              <a:rPr lang="en" sz="2400" b="0" i="0" u="none" strike="noStrike" cap="none" dirty="0">
                 <a:solidFill>
                   <a:srgbClr val="000000"/>
                 </a:solidFill>
@@ -22266,7 +22777,7 @@
               </a:rPr>
               <a:t>Example</a:t>
             </a:r>
-            <a:endParaRPr sz="2400" b="0" i="0" u="none" strike="noStrike" cap="none">
+            <a:endParaRPr sz="2400" b="0" i="0" u="none" strike="noStrike" cap="none" dirty="0">
               <a:solidFill>
                 <a:srgbClr val="000000"/>
               </a:solidFill>
@@ -22294,7 +22805,7 @@
               <a:buFont typeface="Arial"/>
               <a:buNone/>
             </a:pPr>
-            <a:endParaRPr sz="1400" b="0" i="0" u="none" strike="noStrike" cap="none">
+            <a:endParaRPr sz="1400" b="0" i="0" u="none" strike="noStrike" cap="none" dirty="0">
               <a:solidFill>
                 <a:srgbClr val="000000"/>
               </a:solidFill>
@@ -22323,7 +22834,7 @@
               <a:buNone/>
             </a:pPr>
             <a:r>
-              <a:rPr lang="en" sz="1400" b="1" i="0" u="none" strike="noStrike" cap="none">
+              <a:rPr lang="en" sz="1400" b="1" i="0" u="none" strike="noStrike" cap="none" dirty="0">
                 <a:solidFill>
                   <a:srgbClr val="000000"/>
                 </a:solidFill>
@@ -22335,7 +22846,7 @@
               <a:t>Study</a:t>
             </a:r>
             <a:r>
-              <a:rPr lang="en" sz="1400" b="0" i="0" u="none" strike="noStrike" cap="none">
+              <a:rPr lang="en" sz="1400" b="0" i="0" u="none" strike="noStrike" cap="none" dirty="0">
                 <a:solidFill>
                   <a:srgbClr val="000000"/>
                 </a:solidFill>
@@ -22346,7 +22857,7 @@
               </a:rPr>
               <a:t>: Pathogen landscape associated with febrile illness in Cambodia</a:t>
             </a:r>
-            <a:endParaRPr sz="1400" b="0" i="0" u="none" strike="noStrike" cap="none">
+            <a:endParaRPr sz="1400" b="0" i="0" u="none" strike="noStrike" cap="none" dirty="0">
               <a:solidFill>
                 <a:srgbClr val="000000"/>
               </a:solidFill>
@@ -22374,7 +22885,7 @@
               <a:buFont typeface="Arial"/>
               <a:buNone/>
             </a:pPr>
-            <a:endParaRPr sz="1400" b="0" i="0" u="none" strike="noStrike" cap="none">
+            <a:endParaRPr sz="1400" b="0" i="0" u="none" strike="noStrike" cap="none" dirty="0">
               <a:solidFill>
                 <a:srgbClr val="000000"/>
               </a:solidFill>
@@ -22403,7 +22914,7 @@
               <a:buNone/>
             </a:pPr>
             <a:r>
-              <a:rPr lang="en" sz="1400" b="1" i="0" u="none" strike="noStrike" cap="none">
+              <a:rPr lang="en" sz="1400" b="1" i="0" u="none" strike="noStrike" cap="none" dirty="0">
                 <a:solidFill>
                   <a:srgbClr val="000000"/>
                 </a:solidFill>
@@ -22415,7 +22926,7 @@
               <a:t>Sample type</a:t>
             </a:r>
             <a:r>
-              <a:rPr lang="en" sz="1400" b="0" i="0" u="none" strike="noStrike" cap="none">
+              <a:rPr lang="en" sz="1400" b="0" i="0" u="none" strike="noStrike" cap="none" dirty="0">
                 <a:solidFill>
                   <a:srgbClr val="000000"/>
                 </a:solidFill>
@@ -22426,7 +22937,7 @@
               </a:rPr>
               <a:t>: Serum</a:t>
             </a:r>
-            <a:endParaRPr sz="1400" b="0" i="0" u="none" strike="noStrike" cap="none">
+            <a:endParaRPr sz="1400" b="0" i="0" u="none" strike="noStrike" cap="none" dirty="0">
               <a:solidFill>
                 <a:srgbClr val="000000"/>
               </a:solidFill>
@@ -22454,7 +22965,7 @@
               <a:buFont typeface="Arial"/>
               <a:buNone/>
             </a:pPr>
-            <a:endParaRPr sz="1400" b="0" i="0" u="none" strike="noStrike" cap="none">
+            <a:endParaRPr sz="1400" b="0" i="0" u="none" strike="noStrike" cap="none" dirty="0">
               <a:solidFill>
                 <a:srgbClr val="000000"/>
               </a:solidFill>
@@ -22483,7 +22994,7 @@
               <a:buNone/>
             </a:pPr>
             <a:r>
-              <a:rPr lang="en" sz="1400" b="1" i="0" u="none" strike="noStrike" cap="none">
+              <a:rPr lang="en" sz="1400" b="1" i="0" u="none" strike="noStrike" cap="none" dirty="0">
                 <a:solidFill>
                   <a:srgbClr val="000000"/>
                 </a:solidFill>
@@ -22495,7 +23006,7 @@
               <a:t>Results</a:t>
             </a:r>
             <a:r>
-              <a:rPr lang="en" sz="1400" b="0" i="0" u="none" strike="noStrike" cap="none">
+              <a:rPr lang="en" sz="1400" b="0" i="0" u="none" strike="noStrike" cap="none" dirty="0">
                 <a:solidFill>
                   <a:srgbClr val="000000"/>
                 </a:solidFill>
@@ -22506,7 +23017,7 @@
               </a:rPr>
               <a:t>: 203 pathogens detected from 489 samples</a:t>
             </a:r>
-            <a:endParaRPr sz="1400" b="0" i="0" u="none" strike="noStrike" cap="none">
+            <a:endParaRPr sz="1400" b="0" i="0" u="none" strike="noStrike" cap="none" dirty="0">
               <a:solidFill>
                 <a:srgbClr val="000000"/>
               </a:solidFill>
@@ -22534,7 +23045,7 @@
               <a:buFont typeface="Arial"/>
               <a:buNone/>
             </a:pPr>
-            <a:endParaRPr sz="1400" b="0" i="0" u="none" strike="noStrike" cap="none">
+            <a:endParaRPr sz="1400" b="0" i="0" u="none" strike="noStrike" cap="none" dirty="0">
               <a:solidFill>
                 <a:srgbClr val="000000"/>
               </a:solidFill>
@@ -22563,7 +23074,7 @@
               <a:buNone/>
             </a:pPr>
             <a:r>
-              <a:rPr lang="en" sz="1400" b="1" i="0" u="none" strike="noStrike" cap="none">
+              <a:rPr lang="en" sz="1400" b="1" i="0" u="none" strike="noStrike" cap="none" dirty="0">
                 <a:solidFill>
                   <a:srgbClr val="000000"/>
                 </a:solidFill>
@@ -22575,7 +23086,7 @@
               <a:t>Figure</a:t>
             </a:r>
             <a:r>
-              <a:rPr lang="en" sz="1400" b="0" i="0" u="none" strike="noStrike" cap="none">
+              <a:rPr lang="en" sz="1400" b="0" i="0" u="none" strike="noStrike" cap="none" dirty="0">
                 <a:solidFill>
                   <a:srgbClr val="000000"/>
                 </a:solidFill>
@@ -22586,7 +23097,7 @@
               </a:rPr>
               <a:t>: Pathogens organized by disease category. Detection distinguished by participant cohort (community- (n = 87) vs hospital-based cohorts (n = 377)]</a:t>
             </a:r>
-            <a:endParaRPr sz="1400" b="0" i="0" u="none" strike="noStrike" cap="none">
+            <a:endParaRPr sz="1400" b="0" i="0" u="none" strike="noStrike" cap="none" dirty="0">
               <a:solidFill>
                 <a:srgbClr val="000000"/>
               </a:solidFill>
@@ -22614,7 +23125,7 @@
               <a:buFont typeface="Arial"/>
               <a:buNone/>
             </a:pPr>
-            <a:endParaRPr sz="1400" b="0" i="0" u="none" strike="noStrike" cap="none">
+            <a:endParaRPr sz="1400" b="0" i="0" u="none" strike="noStrike" cap="none" dirty="0">
               <a:solidFill>
                 <a:srgbClr val="000000"/>
               </a:solidFill>
@@ -22701,7 +23212,7 @@
 </p:sld>
 </file>
 
-<file path=ppt/slides/slide11.xml><?xml version="1.0" encoding="utf-8"?>
+<file path=ppt/slides/slide13.xml><?xml version="1.0" encoding="utf-8"?>
 <p:sld xmlns:a="http://schemas.openxmlformats.org/drawingml/2006/main" xmlns:r="http://schemas.openxmlformats.org/officeDocument/2006/relationships" xmlns:p="http://schemas.openxmlformats.org/presentationml/2006/main">
   <p:cSld>
     <p:spTree>
@@ -23302,7 +23813,7 @@
         </p:nvSpPr>
         <p:spPr>
           <a:xfrm>
-            <a:off x="3843800" y="2096900"/>
+            <a:off x="3759134" y="2187651"/>
             <a:ext cx="1104300" cy="291000"/>
           </a:xfrm>
           <a:prstGeom prst="rect">
@@ -23450,7 +23961,7 @@
 </p:sld>
 </file>
 
-<file path=ppt/slides/slide12.xml><?xml version="1.0" encoding="utf-8"?>
+<file path=ppt/slides/slide14.xml><?xml version="1.0" encoding="utf-8"?>
 <p:sld xmlns:a="http://schemas.openxmlformats.org/drawingml/2006/main" xmlns:r="http://schemas.openxmlformats.org/officeDocument/2006/relationships" xmlns:p="http://schemas.openxmlformats.org/presentationml/2006/main">
   <p:cSld>
     <p:spTree>
@@ -23510,16 +24021,16 @@
               <a:buNone/>
             </a:pPr>
             <a:r>
-              <a:rPr lang="en" sz="2400">
-                <a:latin typeface="Open Sans"/>
+              <a:rPr lang="en" sz="2500">
+                <a:latin typeface="+mj-lt"/>
                 <a:ea typeface="Open Sans"/>
                 <a:cs typeface="Open Sans"/>
                 <a:sym typeface="Open Sans"/>
               </a:rPr>
               <a:t>Compare samples visually to identify patterns of interest</a:t>
             </a:r>
-            <a:endParaRPr sz="2400">
-              <a:latin typeface="Open Sans"/>
+            <a:endParaRPr sz="2500">
+              <a:latin typeface="+mj-lt"/>
               <a:ea typeface="Open Sans"/>
               <a:cs typeface="Open Sans"/>
               <a:sym typeface="Open Sans"/>
@@ -23562,7 +24073,7 @@
 </p:sld>
 </file>
 
-<file path=ppt/slides/slide13.xml><?xml version="1.0" encoding="utf-8"?>
+<file path=ppt/slides/slide15.xml><?xml version="1.0" encoding="utf-8"?>
 <p:sld xmlns:a="http://schemas.openxmlformats.org/drawingml/2006/main" xmlns:r="http://schemas.openxmlformats.org/officeDocument/2006/relationships" xmlns:p="http://schemas.openxmlformats.org/presentationml/2006/main">
   <p:cSld>
     <p:spTree>
@@ -23622,16 +24133,16 @@
               <a:buNone/>
             </a:pPr>
             <a:r>
-              <a:rPr lang="en" sz="2400">
-                <a:latin typeface="Open Sans"/>
+              <a:rPr lang="en" sz="2500">
+                <a:latin typeface="+mj-lt"/>
                 <a:ea typeface="Open Sans"/>
                 <a:cs typeface="Open Sans"/>
                 <a:sym typeface="Open Sans"/>
               </a:rPr>
               <a:t>Create viral consensus genomes</a:t>
             </a:r>
-            <a:endParaRPr sz="2400">
-              <a:latin typeface="Open Sans"/>
+            <a:endParaRPr sz="2500">
+              <a:latin typeface="+mj-lt"/>
               <a:ea typeface="Open Sans"/>
               <a:cs typeface="Open Sans"/>
               <a:sym typeface="Open Sans"/>
@@ -23681,7 +24192,7 @@
 </p:sld>
 </file>
 
-<file path=ppt/slides/slide14.xml><?xml version="1.0" encoding="utf-8"?>
+<file path=ppt/slides/slide16.xml><?xml version="1.0" encoding="utf-8"?>
 <p:sld xmlns:a="http://schemas.openxmlformats.org/drawingml/2006/main" xmlns:r="http://schemas.openxmlformats.org/officeDocument/2006/relationships" xmlns:p="http://schemas.openxmlformats.org/presentationml/2006/main">
   <p:cSld>
     <p:spTree>
@@ -23741,16 +24252,16 @@
               <a:buNone/>
             </a:pPr>
             <a:r>
-              <a:rPr lang="en" sz="2400">
-                <a:latin typeface="Open Sans"/>
+              <a:rPr lang="en" sz="2500">
+                <a:latin typeface="+mj-lt"/>
                 <a:ea typeface="Open Sans"/>
                 <a:cs typeface="Open Sans"/>
                 <a:sym typeface="Open Sans"/>
               </a:rPr>
               <a:t>View pipeline steps and access intermediate files</a:t>
             </a:r>
-            <a:endParaRPr sz="2400">
-              <a:latin typeface="Open Sans"/>
+            <a:endParaRPr sz="2500">
+              <a:latin typeface="+mj-lt"/>
               <a:ea typeface="Open Sans"/>
               <a:cs typeface="Open Sans"/>
               <a:sym typeface="Open Sans"/>
@@ -23859,7 +24370,907 @@
 </p:sld>
 </file>
 
-<file path=ppt/slides/slide15.xml><?xml version="1.0" encoding="utf-8"?>
+<file path=ppt/slides/slide17.xml><?xml version="1.0" encoding="utf-8"?>
+<p:sld xmlns:a="http://schemas.openxmlformats.org/drawingml/2006/main" xmlns:r="http://schemas.openxmlformats.org/officeDocument/2006/relationships" xmlns:p="http://schemas.openxmlformats.org/presentationml/2006/main">
+  <p:cSld>
+    <p:spTree>
+      <p:nvGrpSpPr>
+        <p:cNvPr id="1" name="Shape 91"/>
+        <p:cNvGrpSpPr/>
+        <p:nvPr/>
+      </p:nvGrpSpPr>
+      <p:grpSpPr>
+        <a:xfrm>
+          <a:off x="0" y="0"/>
+          <a:ext cx="0" cy="0"/>
+          <a:chOff x="0" y="0"/>
+          <a:chExt cx="0" cy="0"/>
+        </a:xfrm>
+      </p:grpSpPr>
+      <p:sp>
+        <p:nvSpPr>
+          <p:cNvPr id="92" name="Google Shape;92;p6"/>
+          <p:cNvSpPr txBox="1">
+            <a:spLocks noGrp="1"/>
+          </p:cNvSpPr>
+          <p:nvPr>
+            <p:ph type="title"/>
+          </p:nvPr>
+        </p:nvSpPr>
+        <p:spPr>
+          <a:xfrm>
+            <a:off x="311700" y="445025"/>
+            <a:ext cx="8520600" cy="572700"/>
+          </a:xfrm>
+          <a:prstGeom prst="rect">
+            <a:avLst/>
+          </a:prstGeom>
+          <a:noFill/>
+          <a:ln>
+            <a:noFill/>
+          </a:ln>
+        </p:spPr>
+        <p:txBody>
+          <a:bodyPr spcFirstLastPara="1" wrap="square" lIns="91425" tIns="91425" rIns="91425" bIns="91425" anchor="t" anchorCtr="0">
+            <a:normAutofit fontScale="90000"/>
+          </a:bodyPr>
+          <a:lstStyle/>
+          <a:p>
+            <a:pPr marL="0" lvl="0" indent="0" algn="l" rtl="0">
+              <a:lnSpc>
+                <a:spcPct val="100000"/>
+              </a:lnSpc>
+              <a:spcBef>
+                <a:spcPts val="0"/>
+              </a:spcBef>
+              <a:spcAft>
+                <a:spcPts val="0"/>
+              </a:spcAft>
+              <a:buSzPct val="111111"/>
+              <a:buNone/>
+            </a:pPr>
+            <a:r>
+              <a:rPr lang="en" dirty="0">
+                <a:latin typeface="+mj-lt"/>
+                <a:ea typeface="Open Sans" panose="020B0606030504020204" pitchFamily="34" charset="0"/>
+                <a:cs typeface="Open Sans" panose="020B0606030504020204" pitchFamily="34" charset="0"/>
+              </a:rPr>
+              <a:t>Publications Describing CZ ID Pipelines</a:t>
+            </a:r>
+            <a:endParaRPr dirty="0">
+              <a:latin typeface="+mj-lt"/>
+              <a:ea typeface="Open Sans" panose="020B0606030504020204" pitchFamily="34" charset="0"/>
+              <a:cs typeface="Open Sans" panose="020B0606030504020204" pitchFamily="34" charset="0"/>
+            </a:endParaRPr>
+          </a:p>
+        </p:txBody>
+      </p:sp>
+      <p:sp>
+        <p:nvSpPr>
+          <p:cNvPr id="93" name="Google Shape;93;p6"/>
+          <p:cNvSpPr txBox="1">
+            <a:spLocks noGrp="1"/>
+          </p:cNvSpPr>
+          <p:nvPr>
+            <p:ph type="body" idx="1"/>
+          </p:nvPr>
+        </p:nvSpPr>
+        <p:spPr>
+          <a:xfrm>
+            <a:off x="311700" y="1152475"/>
+            <a:ext cx="8520600" cy="3723600"/>
+          </a:xfrm>
+          <a:prstGeom prst="rect">
+            <a:avLst/>
+          </a:prstGeom>
+          <a:noFill/>
+          <a:ln>
+            <a:noFill/>
+          </a:ln>
+        </p:spPr>
+        <p:txBody>
+          <a:bodyPr spcFirstLastPara="1" wrap="square" lIns="91425" tIns="91425" rIns="91425" bIns="91425" anchor="t" anchorCtr="0">
+            <a:normAutofit/>
+          </a:bodyPr>
+          <a:lstStyle/>
+          <a:p>
+            <a:pPr marL="457200" lvl="0" indent="-292100" algn="l" rtl="0">
+              <a:lnSpc>
+                <a:spcPct val="115000"/>
+              </a:lnSpc>
+              <a:spcBef>
+                <a:spcPts val="0"/>
+              </a:spcBef>
+              <a:spcAft>
+                <a:spcPts val="0"/>
+              </a:spcAft>
+              <a:buClr>
+                <a:schemeClr val="dk1"/>
+              </a:buClr>
+              <a:buSzPts val="1000"/>
+              <a:buChar char="●"/>
+            </a:pPr>
+            <a:r>
+              <a:rPr lang="en" sz="1600">
+                <a:solidFill>
+                  <a:schemeClr val="dk1"/>
+                </a:solidFill>
+              </a:rPr>
+              <a:t>CZ ID (formerly IDSeq) platform and mNGS Pipeline</a:t>
+            </a:r>
+            <a:endParaRPr sz="1600">
+              <a:solidFill>
+                <a:schemeClr val="dk1"/>
+              </a:solidFill>
+            </a:endParaRPr>
+          </a:p>
+          <a:p>
+            <a:pPr marL="914400" lvl="1" indent="-317500" algn="l" rtl="0">
+              <a:lnSpc>
+                <a:spcPct val="115000"/>
+              </a:lnSpc>
+              <a:spcBef>
+                <a:spcPts val="0"/>
+              </a:spcBef>
+              <a:spcAft>
+                <a:spcPts val="0"/>
+              </a:spcAft>
+              <a:buClr>
+                <a:schemeClr val="dk1"/>
+              </a:buClr>
+              <a:buSzPts val="1400"/>
+              <a:buChar char="○"/>
+            </a:pPr>
+            <a:r>
+              <a:rPr lang="en" u="sng">
+                <a:solidFill>
+                  <a:schemeClr val="accent5"/>
+                </a:solidFill>
+                <a:highlight>
+                  <a:schemeClr val="lt1"/>
+                </a:highlight>
+                <a:hlinkClick r:id="rId3">
+                  <a:extLst>
+                    <a:ext uri="{A12FA001-AC4F-418D-AE19-62706E023703}">
+                      <ahyp:hlinkClr xmlns:ahyp="http://schemas.microsoft.com/office/drawing/2018/hyperlinkcolor" val="tx"/>
+                    </a:ext>
+                  </a:extLst>
+                </a:hlinkClick>
+              </a:rPr>
+              <a:t>IDseq—An open source cloud-based pipeline and analysis service for metagenomic pathogen detection and monitoring</a:t>
+            </a:r>
+            <a:endParaRPr>
+              <a:solidFill>
+                <a:srgbClr val="2A2A2A"/>
+              </a:solidFill>
+              <a:highlight>
+                <a:srgbClr val="FFFFFF"/>
+              </a:highlight>
+            </a:endParaRPr>
+          </a:p>
+          <a:p>
+            <a:pPr marL="914400" lvl="0" indent="0" algn="l" rtl="0">
+              <a:lnSpc>
+                <a:spcPct val="115000"/>
+              </a:lnSpc>
+              <a:spcBef>
+                <a:spcPts val="0"/>
+              </a:spcBef>
+              <a:spcAft>
+                <a:spcPts val="0"/>
+              </a:spcAft>
+              <a:buSzPts val="1800"/>
+              <a:buNone/>
+            </a:pPr>
+            <a:endParaRPr sz="1200">
+              <a:solidFill>
+                <a:srgbClr val="2A2A2A"/>
+              </a:solidFill>
+              <a:highlight>
+                <a:srgbClr val="FFFFFF"/>
+              </a:highlight>
+            </a:endParaRPr>
+          </a:p>
+          <a:p>
+            <a:pPr marL="457200" lvl="0" indent="-330200" algn="l" rtl="0">
+              <a:lnSpc>
+                <a:spcPct val="115000"/>
+              </a:lnSpc>
+              <a:spcBef>
+                <a:spcPts val="0"/>
+              </a:spcBef>
+              <a:spcAft>
+                <a:spcPts val="0"/>
+              </a:spcAft>
+              <a:buClr>
+                <a:srgbClr val="2A2A2A"/>
+              </a:buClr>
+              <a:buSzPts val="1600"/>
+              <a:buChar char="●"/>
+            </a:pPr>
+            <a:r>
+              <a:rPr lang="en" sz="1600">
+                <a:solidFill>
+                  <a:srgbClr val="2A2A2A"/>
+                </a:solidFill>
+                <a:highlight>
+                  <a:srgbClr val="FFFFFF"/>
+                </a:highlight>
+              </a:rPr>
+              <a:t>CZ ID AMR Pipeline</a:t>
+            </a:r>
+            <a:endParaRPr sz="1600">
+              <a:solidFill>
+                <a:srgbClr val="2A2A2A"/>
+              </a:solidFill>
+              <a:highlight>
+                <a:srgbClr val="FFFFFF"/>
+              </a:highlight>
+            </a:endParaRPr>
+          </a:p>
+          <a:p>
+            <a:pPr marL="914400" lvl="1" indent="-317500" algn="l" rtl="0">
+              <a:lnSpc>
+                <a:spcPct val="115000"/>
+              </a:lnSpc>
+              <a:spcBef>
+                <a:spcPts val="0"/>
+              </a:spcBef>
+              <a:spcAft>
+                <a:spcPts val="0"/>
+              </a:spcAft>
+              <a:buClr>
+                <a:srgbClr val="2A2A2A"/>
+              </a:buClr>
+              <a:buSzPts val="1400"/>
+              <a:buChar char="○"/>
+            </a:pPr>
+            <a:r>
+              <a:rPr lang="en" u="sng">
+                <a:solidFill>
+                  <a:schemeClr val="accent5"/>
+                </a:solidFill>
+                <a:highlight>
+                  <a:schemeClr val="lt1"/>
+                </a:highlight>
+                <a:hlinkClick r:id="rId4">
+                  <a:extLst>
+                    <a:ext uri="{A12FA001-AC4F-418D-AE19-62706E023703}">
+                      <ahyp:hlinkClr xmlns:ahyp="http://schemas.microsoft.com/office/drawing/2018/hyperlinkcolor" val="tx"/>
+                    </a:ext>
+                  </a:extLst>
+                </a:hlinkClick>
+              </a:rPr>
+              <a:t>Simultaneous detection of pathogens and antimicrobial resistance genes with the open source, cloud-based, CZ ID pipeline</a:t>
+            </a:r>
+            <a:r>
+              <a:rPr lang="en">
+                <a:solidFill>
+                  <a:srgbClr val="2A2A2A"/>
+                </a:solidFill>
+                <a:highlight>
+                  <a:schemeClr val="lt1"/>
+                </a:highlight>
+              </a:rPr>
+              <a:t> (preprint)</a:t>
+            </a:r>
+            <a:endParaRPr>
+              <a:solidFill>
+                <a:srgbClr val="2A2A2A"/>
+              </a:solidFill>
+              <a:highlight>
+                <a:schemeClr val="lt1"/>
+              </a:highlight>
+            </a:endParaRPr>
+          </a:p>
+          <a:p>
+            <a:pPr marL="457200" lvl="0" indent="0" algn="l" rtl="0">
+              <a:lnSpc>
+                <a:spcPct val="115000"/>
+              </a:lnSpc>
+              <a:spcBef>
+                <a:spcPts val="0"/>
+              </a:spcBef>
+              <a:spcAft>
+                <a:spcPts val="0"/>
+              </a:spcAft>
+              <a:buSzPts val="1800"/>
+              <a:buNone/>
+            </a:pPr>
+            <a:endParaRPr sz="1200">
+              <a:solidFill>
+                <a:srgbClr val="2A2A2A"/>
+              </a:solidFill>
+              <a:highlight>
+                <a:srgbClr val="FFFFFF"/>
+              </a:highlight>
+            </a:endParaRPr>
+          </a:p>
+          <a:p>
+            <a:pPr marL="457200" lvl="0" indent="-330200" algn="l" rtl="0">
+              <a:lnSpc>
+                <a:spcPct val="115000"/>
+              </a:lnSpc>
+              <a:spcBef>
+                <a:spcPts val="0"/>
+              </a:spcBef>
+              <a:spcAft>
+                <a:spcPts val="0"/>
+              </a:spcAft>
+              <a:buClr>
+                <a:srgbClr val="2A2A2A"/>
+              </a:buClr>
+              <a:buSzPts val="1600"/>
+              <a:buChar char="●"/>
+            </a:pPr>
+            <a:r>
+              <a:rPr lang="en" sz="1600">
+                <a:solidFill>
+                  <a:srgbClr val="2A2A2A"/>
+                </a:solidFill>
+                <a:highlight>
+                  <a:srgbClr val="FFFFFF"/>
+                </a:highlight>
+              </a:rPr>
+              <a:t>CZ ID Nanopore mNGS Pipeline</a:t>
+            </a:r>
+            <a:endParaRPr sz="1600">
+              <a:solidFill>
+                <a:srgbClr val="2A2A2A"/>
+              </a:solidFill>
+              <a:highlight>
+                <a:srgbClr val="FFFFFF"/>
+              </a:highlight>
+            </a:endParaRPr>
+          </a:p>
+          <a:p>
+            <a:pPr marL="914400" lvl="1" indent="-317500" algn="l" rtl="0">
+              <a:lnSpc>
+                <a:spcPct val="115000"/>
+              </a:lnSpc>
+              <a:spcBef>
+                <a:spcPts val="0"/>
+              </a:spcBef>
+              <a:spcAft>
+                <a:spcPts val="0"/>
+              </a:spcAft>
+              <a:buClr>
+                <a:srgbClr val="2A2A2A"/>
+              </a:buClr>
+              <a:buSzPts val="1400"/>
+              <a:buChar char="○"/>
+            </a:pPr>
+            <a:r>
+              <a:rPr lang="en" u="sng">
+                <a:solidFill>
+                  <a:schemeClr val="hlink"/>
+                </a:solidFill>
+                <a:highlight>
+                  <a:srgbClr val="FFFFFF"/>
+                </a:highlight>
+                <a:hlinkClick r:id="rId5"/>
+              </a:rPr>
+              <a:t>CZ ID: a cloud-based, no-code platform enabling advanced long read metagenomic analysis</a:t>
+            </a:r>
+            <a:r>
+              <a:rPr lang="en">
+                <a:solidFill>
+                  <a:srgbClr val="2A2A2A"/>
+                </a:solidFill>
+                <a:highlight>
+                  <a:srgbClr val="FFFFFF"/>
+                </a:highlight>
+              </a:rPr>
+              <a:t> (preprint)</a:t>
+            </a:r>
+            <a:endParaRPr>
+              <a:solidFill>
+                <a:srgbClr val="2A2A2A"/>
+              </a:solidFill>
+              <a:highlight>
+                <a:srgbClr val="FFFFFF"/>
+              </a:highlight>
+            </a:endParaRPr>
+          </a:p>
+          <a:p>
+            <a:pPr marL="457200" lvl="0" indent="0" algn="l" rtl="0">
+              <a:lnSpc>
+                <a:spcPct val="100000"/>
+              </a:lnSpc>
+              <a:spcBef>
+                <a:spcPts val="0"/>
+              </a:spcBef>
+              <a:spcAft>
+                <a:spcPts val="0"/>
+              </a:spcAft>
+              <a:buSzPts val="1800"/>
+              <a:buNone/>
+            </a:pPr>
+            <a:endParaRPr sz="1200">
+              <a:solidFill>
+                <a:schemeClr val="dk1"/>
+              </a:solidFill>
+            </a:endParaRPr>
+          </a:p>
+          <a:p>
+            <a:pPr marL="0" lvl="0" indent="0" algn="l" rtl="0">
+              <a:lnSpc>
+                <a:spcPct val="115000"/>
+              </a:lnSpc>
+              <a:spcBef>
+                <a:spcPts val="0"/>
+              </a:spcBef>
+              <a:spcAft>
+                <a:spcPts val="1200"/>
+              </a:spcAft>
+              <a:buSzPts val="1800"/>
+              <a:buNone/>
+            </a:pPr>
+            <a:endParaRPr sz="1200"/>
+          </a:p>
+        </p:txBody>
+      </p:sp>
+    </p:spTree>
+  </p:cSld>
+  <p:clrMapOvr>
+    <a:masterClrMapping/>
+  </p:clrMapOvr>
+</p:sld>
+</file>
+
+<file path=ppt/slides/slide18.xml><?xml version="1.0" encoding="utf-8"?>
+<p:sld xmlns:a="http://schemas.openxmlformats.org/drawingml/2006/main" xmlns:r="http://schemas.openxmlformats.org/officeDocument/2006/relationships" xmlns:p="http://schemas.openxmlformats.org/presentationml/2006/main">
+  <p:cSld>
+    <p:spTree>
+      <p:nvGrpSpPr>
+        <p:cNvPr id="1" name="Shape 97"/>
+        <p:cNvGrpSpPr/>
+        <p:nvPr/>
+      </p:nvGrpSpPr>
+      <p:grpSpPr>
+        <a:xfrm>
+          <a:off x="0" y="0"/>
+          <a:ext cx="0" cy="0"/>
+          <a:chOff x="0" y="0"/>
+          <a:chExt cx="0" cy="0"/>
+        </a:xfrm>
+      </p:grpSpPr>
+      <p:sp>
+        <p:nvSpPr>
+          <p:cNvPr id="98" name="Google Shape;98;g2e31309483e_0_2"/>
+          <p:cNvSpPr txBox="1">
+            <a:spLocks noGrp="1"/>
+          </p:cNvSpPr>
+          <p:nvPr>
+            <p:ph type="title"/>
+          </p:nvPr>
+        </p:nvSpPr>
+        <p:spPr>
+          <a:xfrm>
+            <a:off x="311700" y="445025"/>
+            <a:ext cx="8520600" cy="572700"/>
+          </a:xfrm>
+          <a:prstGeom prst="rect">
+            <a:avLst/>
+          </a:prstGeom>
+          <a:noFill/>
+          <a:ln>
+            <a:noFill/>
+          </a:ln>
+        </p:spPr>
+        <p:txBody>
+          <a:bodyPr spcFirstLastPara="1" wrap="square" lIns="91425" tIns="91425" rIns="91425" bIns="91425" anchor="t" anchorCtr="0">
+            <a:normAutofit fontScale="90000"/>
+          </a:bodyPr>
+          <a:lstStyle/>
+          <a:p>
+            <a:pPr marL="0" lvl="0" indent="0" algn="l" rtl="0">
+              <a:lnSpc>
+                <a:spcPct val="100000"/>
+              </a:lnSpc>
+              <a:spcBef>
+                <a:spcPts val="0"/>
+              </a:spcBef>
+              <a:spcAft>
+                <a:spcPts val="0"/>
+              </a:spcAft>
+              <a:buSzPct val="111111"/>
+              <a:buNone/>
+            </a:pPr>
+            <a:r>
+              <a:rPr lang="en" dirty="0">
+                <a:latin typeface="+mj-lt"/>
+                <a:ea typeface="Open Sans" panose="020B0606030504020204" pitchFamily="34" charset="0"/>
+                <a:cs typeface="Open Sans" panose="020B0606030504020204" pitchFamily="34" charset="0"/>
+              </a:rPr>
+              <a:t>Example Publications</a:t>
+            </a:r>
+            <a:endParaRPr dirty="0">
+              <a:latin typeface="+mj-lt"/>
+              <a:ea typeface="Open Sans" panose="020B0606030504020204" pitchFamily="34" charset="0"/>
+              <a:cs typeface="Open Sans" panose="020B0606030504020204" pitchFamily="34" charset="0"/>
+            </a:endParaRPr>
+          </a:p>
+        </p:txBody>
+      </p:sp>
+      <p:sp>
+        <p:nvSpPr>
+          <p:cNvPr id="99" name="Google Shape;99;g2e31309483e_0_2"/>
+          <p:cNvSpPr txBox="1">
+            <a:spLocks noGrp="1"/>
+          </p:cNvSpPr>
+          <p:nvPr>
+            <p:ph type="body" idx="1"/>
+          </p:nvPr>
+        </p:nvSpPr>
+        <p:spPr>
+          <a:xfrm>
+            <a:off x="311700" y="896475"/>
+            <a:ext cx="8520600" cy="3723600"/>
+          </a:xfrm>
+          <a:prstGeom prst="rect">
+            <a:avLst/>
+          </a:prstGeom>
+          <a:noFill/>
+          <a:ln>
+            <a:noFill/>
+          </a:ln>
+        </p:spPr>
+        <p:txBody>
+          <a:bodyPr spcFirstLastPara="1" wrap="square" lIns="91425" tIns="91425" rIns="91425" bIns="91425" anchor="t" anchorCtr="0">
+            <a:noAutofit/>
+          </a:bodyPr>
+          <a:lstStyle/>
+          <a:p>
+            <a:pPr marL="0" lvl="0" indent="0" algn="l" rtl="0">
+              <a:lnSpc>
+                <a:spcPct val="115000"/>
+              </a:lnSpc>
+              <a:spcBef>
+                <a:spcPts val="0"/>
+              </a:spcBef>
+              <a:spcAft>
+                <a:spcPts val="0"/>
+              </a:spcAft>
+              <a:buSzPts val="1800"/>
+              <a:buNone/>
+            </a:pPr>
+            <a:endParaRPr sz="1500">
+              <a:solidFill>
+                <a:srgbClr val="2A2A2A"/>
+              </a:solidFill>
+              <a:highlight>
+                <a:srgbClr val="FFFFFF"/>
+              </a:highlight>
+            </a:endParaRPr>
+          </a:p>
+          <a:p>
+            <a:pPr marL="457200" lvl="0" indent="-323850" algn="l" rtl="0">
+              <a:lnSpc>
+                <a:spcPct val="115000"/>
+              </a:lnSpc>
+              <a:spcBef>
+                <a:spcPts val="0"/>
+              </a:spcBef>
+              <a:spcAft>
+                <a:spcPts val="0"/>
+              </a:spcAft>
+              <a:buClr>
+                <a:srgbClr val="2A2A2A"/>
+              </a:buClr>
+              <a:buSzPts val="1500"/>
+              <a:buChar char="●"/>
+            </a:pPr>
+            <a:r>
+              <a:rPr lang="en" sz="1500" u="sng">
+                <a:solidFill>
+                  <a:schemeClr val="hlink"/>
+                </a:solidFill>
+                <a:highlight>
+                  <a:srgbClr val="FFFFFF"/>
+                </a:highlight>
+                <a:hlinkClick r:id="rId3"/>
+              </a:rPr>
+              <a:t>Pathogen genomics in public health</a:t>
+            </a:r>
+            <a:endParaRPr sz="1500">
+              <a:solidFill>
+                <a:srgbClr val="2A2A2A"/>
+              </a:solidFill>
+              <a:highlight>
+                <a:srgbClr val="FFFFFF"/>
+              </a:highlight>
+            </a:endParaRPr>
+          </a:p>
+          <a:p>
+            <a:pPr marL="457200" lvl="0" indent="0" algn="l" rtl="0">
+              <a:lnSpc>
+                <a:spcPct val="115000"/>
+              </a:lnSpc>
+              <a:spcBef>
+                <a:spcPts val="0"/>
+              </a:spcBef>
+              <a:spcAft>
+                <a:spcPts val="0"/>
+              </a:spcAft>
+              <a:buSzPts val="1800"/>
+              <a:buNone/>
+            </a:pPr>
+            <a:endParaRPr sz="1500">
+              <a:solidFill>
+                <a:srgbClr val="2A2A2A"/>
+              </a:solidFill>
+              <a:highlight>
+                <a:srgbClr val="FFFFFF"/>
+              </a:highlight>
+            </a:endParaRPr>
+          </a:p>
+          <a:p>
+            <a:pPr marL="457200" lvl="0" indent="-323850" algn="l" rtl="0">
+              <a:lnSpc>
+                <a:spcPct val="115000"/>
+              </a:lnSpc>
+              <a:spcBef>
+                <a:spcPts val="0"/>
+              </a:spcBef>
+              <a:spcAft>
+                <a:spcPts val="0"/>
+              </a:spcAft>
+              <a:buClr>
+                <a:srgbClr val="2A2A2A"/>
+              </a:buClr>
+              <a:buSzPts val="1500"/>
+              <a:buChar char="●"/>
+            </a:pPr>
+            <a:r>
+              <a:rPr lang="en" sz="1500" u="sng">
+                <a:solidFill>
+                  <a:schemeClr val="hlink"/>
+                </a:solidFill>
+                <a:highlight>
+                  <a:srgbClr val="FFFFFF"/>
+                </a:highlight>
+                <a:hlinkClick r:id="rId4"/>
+              </a:rPr>
+              <a:t>Unbiased metagenomic sequencing for pediatric meningitis in Bangladesh reveals neuroinvasive Chikungunya virus outbreak and other unrealized pathogens</a:t>
+            </a:r>
+            <a:endParaRPr sz="1500">
+              <a:solidFill>
+                <a:srgbClr val="2A2A2A"/>
+              </a:solidFill>
+            </a:endParaRPr>
+          </a:p>
+          <a:p>
+            <a:pPr marL="457200" lvl="0" indent="0" algn="l" rtl="0">
+              <a:lnSpc>
+                <a:spcPct val="115000"/>
+              </a:lnSpc>
+              <a:spcBef>
+                <a:spcPts val="0"/>
+              </a:spcBef>
+              <a:spcAft>
+                <a:spcPts val="0"/>
+              </a:spcAft>
+              <a:buSzPts val="1800"/>
+              <a:buNone/>
+            </a:pPr>
+            <a:endParaRPr sz="1500">
+              <a:solidFill>
+                <a:schemeClr val="dk1"/>
+              </a:solidFill>
+            </a:endParaRPr>
+          </a:p>
+          <a:p>
+            <a:pPr marL="457200" lvl="0" indent="-323850" algn="l" rtl="0">
+              <a:lnSpc>
+                <a:spcPct val="100000"/>
+              </a:lnSpc>
+              <a:spcBef>
+                <a:spcPts val="0"/>
+              </a:spcBef>
+              <a:spcAft>
+                <a:spcPts val="0"/>
+              </a:spcAft>
+              <a:buClr>
+                <a:schemeClr val="dk1"/>
+              </a:buClr>
+              <a:buSzPts val="1500"/>
+              <a:buChar char="●"/>
+            </a:pPr>
+            <a:r>
+              <a:rPr lang="en" sz="1500" u="sng">
+                <a:solidFill>
+                  <a:schemeClr val="hlink"/>
+                </a:solidFill>
+                <a:highlight>
+                  <a:srgbClr val="FFFFFF"/>
+                </a:highlight>
+                <a:hlinkClick r:id="rId5"/>
+              </a:rPr>
+              <a:t>Integrating central nervous system metagenomics and host response for diagnosis of tuberculosis meningitis and its mimics</a:t>
+            </a:r>
+            <a:endParaRPr sz="1500">
+              <a:solidFill>
+                <a:schemeClr val="dk1"/>
+              </a:solidFill>
+            </a:endParaRPr>
+          </a:p>
+          <a:p>
+            <a:pPr marL="457200" lvl="0" indent="0" algn="l" rtl="0">
+              <a:lnSpc>
+                <a:spcPct val="100000"/>
+              </a:lnSpc>
+              <a:spcBef>
+                <a:spcPts val="0"/>
+              </a:spcBef>
+              <a:spcAft>
+                <a:spcPts val="0"/>
+              </a:spcAft>
+              <a:buSzPts val="1800"/>
+              <a:buNone/>
+            </a:pPr>
+            <a:endParaRPr sz="1500">
+              <a:solidFill>
+                <a:schemeClr val="dk1"/>
+              </a:solidFill>
+            </a:endParaRPr>
+          </a:p>
+          <a:p>
+            <a:pPr marL="457200" lvl="0" indent="-323850" algn="l" rtl="0">
+              <a:lnSpc>
+                <a:spcPct val="100000"/>
+              </a:lnSpc>
+              <a:spcBef>
+                <a:spcPts val="0"/>
+              </a:spcBef>
+              <a:spcAft>
+                <a:spcPts val="0"/>
+              </a:spcAft>
+              <a:buClr>
+                <a:schemeClr val="dk1"/>
+              </a:buClr>
+              <a:buSzPts val="1500"/>
+              <a:buChar char="●"/>
+            </a:pPr>
+            <a:r>
+              <a:rPr lang="en" sz="1500" u="sng">
+                <a:solidFill>
+                  <a:schemeClr val="hlink"/>
+                </a:solidFill>
+                <a:highlight>
+                  <a:srgbClr val="FFFFFF"/>
+                </a:highlight>
+                <a:hlinkClick r:id="rId6"/>
+              </a:rPr>
+              <a:t>Metagenomic sequencing of post-mortem tissue samples for the identification of pathogens associated with neonatal deaths</a:t>
+            </a:r>
+            <a:r>
+              <a:rPr lang="en" sz="1500" u="sng">
+                <a:solidFill>
+                  <a:schemeClr val="hlink"/>
+                </a:solidFill>
+                <a:highlight>
+                  <a:srgbClr val="FFFFFF"/>
+                </a:highlight>
+              </a:rPr>
+              <a:t> </a:t>
+            </a:r>
+            <a:endParaRPr sz="1500">
+              <a:solidFill>
+                <a:schemeClr val="dk1"/>
+              </a:solidFill>
+            </a:endParaRPr>
+          </a:p>
+          <a:p>
+            <a:pPr marL="0" lvl="0" indent="0" algn="l" rtl="0">
+              <a:lnSpc>
+                <a:spcPct val="100000"/>
+              </a:lnSpc>
+              <a:spcBef>
+                <a:spcPts val="0"/>
+              </a:spcBef>
+              <a:spcAft>
+                <a:spcPts val="0"/>
+              </a:spcAft>
+              <a:buSzPts val="1800"/>
+              <a:buNone/>
+            </a:pPr>
+            <a:endParaRPr sz="1500">
+              <a:solidFill>
+                <a:schemeClr val="dk1"/>
+              </a:solidFill>
+            </a:endParaRPr>
+          </a:p>
+          <a:p>
+            <a:pPr marL="457200" lvl="0" indent="-323850" algn="l" rtl="0">
+              <a:lnSpc>
+                <a:spcPct val="100000"/>
+              </a:lnSpc>
+              <a:spcBef>
+                <a:spcPts val="0"/>
+              </a:spcBef>
+              <a:spcAft>
+                <a:spcPts val="0"/>
+              </a:spcAft>
+              <a:buClr>
+                <a:schemeClr val="dk1"/>
+              </a:buClr>
+              <a:buSzPts val="1500"/>
+              <a:buChar char="●"/>
+            </a:pPr>
+            <a:r>
+              <a:rPr lang="en" sz="1500" u="sng">
+                <a:solidFill>
+                  <a:schemeClr val="hlink"/>
+                </a:solidFill>
+                <a:highlight>
+                  <a:srgbClr val="FFFFFF"/>
+                </a:highlight>
+                <a:hlinkClick r:id="rId7"/>
+              </a:rPr>
+              <a:t>Discovering disease-causing pathogens in resource-scarce Southeast Asia using a global metagenomic pathogen monitoring system</a:t>
+            </a:r>
+            <a:r>
+              <a:rPr lang="en" sz="1500">
+                <a:solidFill>
+                  <a:schemeClr val="dk1"/>
+                </a:solidFill>
+              </a:rPr>
+              <a:t> </a:t>
+            </a:r>
+            <a:endParaRPr sz="1500">
+              <a:solidFill>
+                <a:schemeClr val="dk1"/>
+              </a:solidFill>
+            </a:endParaRPr>
+          </a:p>
+          <a:p>
+            <a:pPr marL="457200" lvl="0" indent="0" algn="l" rtl="0">
+              <a:lnSpc>
+                <a:spcPct val="100000"/>
+              </a:lnSpc>
+              <a:spcBef>
+                <a:spcPts val="0"/>
+              </a:spcBef>
+              <a:spcAft>
+                <a:spcPts val="0"/>
+              </a:spcAft>
+              <a:buSzPts val="1800"/>
+              <a:buNone/>
+            </a:pPr>
+            <a:endParaRPr sz="1500">
+              <a:solidFill>
+                <a:schemeClr val="dk1"/>
+              </a:solidFill>
+            </a:endParaRPr>
+          </a:p>
+          <a:p>
+            <a:pPr marL="0" lvl="0" indent="0" algn="l" rtl="0">
+              <a:lnSpc>
+                <a:spcPct val="115000"/>
+              </a:lnSpc>
+              <a:spcBef>
+                <a:spcPts val="0"/>
+              </a:spcBef>
+              <a:spcAft>
+                <a:spcPts val="1200"/>
+              </a:spcAft>
+              <a:buSzPts val="1800"/>
+              <a:buNone/>
+            </a:pPr>
+            <a:endParaRPr sz="1500"/>
+          </a:p>
+        </p:txBody>
+      </p:sp>
+    </p:spTree>
+  </p:cSld>
+  <p:clrMapOvr>
+    <a:masterClrMapping/>
+  </p:clrMapOvr>
+</p:sld>
+</file>
+
+<file path=ppt/slides/slide19.xml><?xml version="1.0" encoding="utf-8"?>
 <p:sld xmlns:a="http://schemas.openxmlformats.org/drawingml/2006/main" xmlns:r="http://schemas.openxmlformats.org/officeDocument/2006/relationships" xmlns:p="http://schemas.openxmlformats.org/presentationml/2006/main">
   <p:cSld>
     <p:spTree>
@@ -23919,16 +25330,16 @@
               <a:buNone/>
             </a:pPr>
             <a:r>
-              <a:rPr lang="en" sz="2400">
-                <a:latin typeface="Open Sans"/>
+              <a:rPr lang="en" sz="2500" dirty="0">
+                <a:latin typeface="+mj-lt"/>
                 <a:ea typeface="Open Sans"/>
                 <a:cs typeface="Open Sans"/>
                 <a:sym typeface="Open Sans"/>
               </a:rPr>
               <a:t>And more!</a:t>
             </a:r>
-            <a:endParaRPr sz="2400">
-              <a:latin typeface="Open Sans"/>
+            <a:endParaRPr sz="2500" dirty="0">
+              <a:latin typeface="+mj-lt"/>
               <a:ea typeface="Open Sans"/>
               <a:cs typeface="Open Sans"/>
               <a:sym typeface="Open Sans"/>
@@ -23948,8 +25359,8 @@
               <a:buSzPts val="3300"/>
               <a:buNone/>
             </a:pPr>
-            <a:endParaRPr sz="2400">
-              <a:latin typeface="Open Sans"/>
+            <a:endParaRPr sz="2500" dirty="0">
+              <a:latin typeface="+mj-lt"/>
               <a:ea typeface="Open Sans"/>
               <a:cs typeface="Open Sans"/>
               <a:sym typeface="Open Sans"/>
@@ -23970,16 +25381,16 @@
               <a:buNone/>
             </a:pPr>
             <a:r>
-              <a:rPr lang="en" sz="2400">
-                <a:latin typeface="Open Sans"/>
+              <a:rPr lang="en" sz="2500" dirty="0">
+                <a:latin typeface="+mj-lt"/>
                 <a:ea typeface="Open Sans"/>
                 <a:cs typeface="Open Sans"/>
                 <a:sym typeface="Open Sans"/>
               </a:rPr>
               <a:t>Let’s look at the pipeline…</a:t>
             </a:r>
-            <a:endParaRPr sz="2400">
-              <a:latin typeface="Open Sans"/>
+            <a:endParaRPr sz="2500" dirty="0">
+              <a:latin typeface="+mj-lt"/>
               <a:ea typeface="Open Sans"/>
               <a:cs typeface="Open Sans"/>
               <a:sym typeface="Open Sans"/>
@@ -23999,8 +25410,8 @@
               <a:buSzPts val="3300"/>
               <a:buNone/>
             </a:pPr>
-            <a:endParaRPr sz="2400">
-              <a:latin typeface="Open Sans"/>
+            <a:endParaRPr sz="2500" dirty="0">
+              <a:latin typeface="+mj-lt"/>
               <a:ea typeface="Open Sans"/>
               <a:cs typeface="Open Sans"/>
               <a:sym typeface="Open Sans"/>
@@ -24020,8 +25431,8 @@
               <a:buSzPts val="3300"/>
               <a:buNone/>
             </a:pPr>
-            <a:endParaRPr sz="2400">
-              <a:latin typeface="Open Sans"/>
+            <a:endParaRPr sz="2500" dirty="0">
+              <a:latin typeface="+mj-lt"/>
               <a:ea typeface="Open Sans"/>
               <a:cs typeface="Open Sans"/>
               <a:sym typeface="Open Sans"/>
@@ -24041,8 +25452,8 @@
               <a:buSzPts val="3300"/>
               <a:buNone/>
             </a:pPr>
-            <a:endParaRPr sz="2400">
-              <a:latin typeface="Open Sans"/>
+            <a:endParaRPr sz="2500" dirty="0">
+              <a:latin typeface="+mj-lt"/>
               <a:ea typeface="Open Sans"/>
               <a:cs typeface="Open Sans"/>
               <a:sym typeface="Open Sans"/>
@@ -24059,6 +25470,196 @@
 </file>
 
 <file path=ppt/slides/slide2.xml><?xml version="1.0" encoding="utf-8"?>
+<p:sld xmlns:a="http://schemas.openxmlformats.org/drawingml/2006/main" xmlns:r="http://schemas.openxmlformats.org/officeDocument/2006/relationships" xmlns:p="http://schemas.openxmlformats.org/presentationml/2006/main">
+  <p:cSld>
+    <p:spTree>
+      <p:nvGrpSpPr>
+        <p:cNvPr id="1" name="Shape 122"/>
+        <p:cNvGrpSpPr/>
+        <p:nvPr/>
+      </p:nvGrpSpPr>
+      <p:grpSpPr>
+        <a:xfrm>
+          <a:off x="0" y="0"/>
+          <a:ext cx="0" cy="0"/>
+          <a:chOff x="0" y="0"/>
+          <a:chExt cx="0" cy="0"/>
+        </a:xfrm>
+      </p:grpSpPr>
+      <p:cxnSp>
+        <p:nvCxnSpPr>
+          <p:cNvPr id="123" name="Google Shape;123;p1"/>
+          <p:cNvCxnSpPr/>
+          <p:nvPr/>
+        </p:nvCxnSpPr>
+        <p:spPr>
+          <a:xfrm>
+            <a:off x="476250" y="2428875"/>
+            <a:ext cx="8191500" cy="0"/>
+          </a:xfrm>
+          <a:prstGeom prst="straightConnector1">
+            <a:avLst/>
+          </a:prstGeom>
+          <a:noFill/>
+          <a:ln w="28575" cap="flat" cmpd="sng">
+            <a:solidFill>
+              <a:srgbClr val="E3EED3">
+                <a:alpha val="40000"/>
+              </a:srgbClr>
+            </a:solidFill>
+            <a:prstDash val="solid"/>
+            <a:miter lim="400000"/>
+            <a:headEnd type="none" w="sm" len="sm"/>
+            <a:tailEnd type="none" w="sm" len="sm"/>
+          </a:ln>
+        </p:spPr>
+      </p:cxnSp>
+      <p:sp>
+        <p:nvSpPr>
+          <p:cNvPr id="124" name="Google Shape;124;p1"/>
+          <p:cNvSpPr txBox="1"/>
+          <p:nvPr/>
+        </p:nvSpPr>
+        <p:spPr>
+          <a:xfrm>
+            <a:off x="476255" y="2523600"/>
+            <a:ext cx="8191500" cy="410700"/>
+          </a:xfrm>
+          <a:prstGeom prst="rect">
+            <a:avLst/>
+          </a:prstGeom>
+          <a:noFill/>
+          <a:ln>
+            <a:noFill/>
+          </a:ln>
+        </p:spPr>
+        <p:txBody>
+          <a:bodyPr spcFirstLastPara="1" wrap="square" lIns="19050" tIns="19050" rIns="19050" bIns="19050" anchor="ctr" anchorCtr="0">
+            <a:noAutofit/>
+          </a:bodyPr>
+          <a:lstStyle/>
+          <a:p>
+            <a:pPr marL="0" marR="0" lvl="0" indent="0" algn="l" rtl="0">
+              <a:lnSpc>
+                <a:spcPct val="120000"/>
+              </a:lnSpc>
+              <a:spcBef>
+                <a:spcPts val="0"/>
+              </a:spcBef>
+              <a:spcAft>
+                <a:spcPts val="0"/>
+              </a:spcAft>
+              <a:buClr>
+                <a:srgbClr val="9DC061"/>
+              </a:buClr>
+              <a:buSzPts val="2300"/>
+              <a:buFont typeface="Poppins"/>
+              <a:buNone/>
+            </a:pPr>
+            <a:r>
+              <a:rPr lang="en" sz="1800" b="0" i="0" u="none" strike="noStrike" cap="none" dirty="0">
+                <a:solidFill>
+                  <a:schemeClr val="dk1"/>
+                </a:solidFill>
+                <a:latin typeface="Open Sans"/>
+                <a:ea typeface="Open Sans"/>
+                <a:cs typeface="Open Sans"/>
+                <a:sym typeface="Open Sans"/>
+              </a:rPr>
+              <a:t>Introduction to CZ ID</a:t>
+            </a:r>
+            <a:endParaRPr sz="1800" b="0" i="0" u="none" strike="noStrike" cap="none" dirty="0">
+              <a:solidFill>
+                <a:schemeClr val="dk1"/>
+              </a:solidFill>
+              <a:latin typeface="Open Sans"/>
+              <a:ea typeface="Open Sans"/>
+              <a:cs typeface="Open Sans"/>
+              <a:sym typeface="Open Sans"/>
+            </a:endParaRPr>
+          </a:p>
+        </p:txBody>
+      </p:sp>
+      <p:pic>
+        <p:nvPicPr>
+          <p:cNvPr id="126" name="Google Shape;126;p1"/>
+          <p:cNvPicPr preferRelativeResize="0"/>
+          <p:nvPr/>
+        </p:nvPicPr>
+        <p:blipFill rotWithShape="1">
+          <a:blip r:embed="rId3">
+            <a:alphaModFix/>
+          </a:blip>
+          <a:srcRect/>
+          <a:stretch/>
+        </p:blipFill>
+        <p:spPr>
+          <a:xfrm>
+            <a:off x="481108" y="1367375"/>
+            <a:ext cx="2960717" cy="966775"/>
+          </a:xfrm>
+          <a:prstGeom prst="rect">
+            <a:avLst/>
+          </a:prstGeom>
+          <a:noFill/>
+          <a:ln>
+            <a:noFill/>
+          </a:ln>
+        </p:spPr>
+      </p:pic>
+      <p:sp>
+        <p:nvSpPr>
+          <p:cNvPr id="3" name="TextBox 2">
+            <a:extLst>
+              <a:ext uri="{FF2B5EF4-FFF2-40B4-BE49-F238E27FC236}">
+                <a16:creationId xmlns:a16="http://schemas.microsoft.com/office/drawing/2014/main" id="{EB60FF70-9392-53F0-EEE9-058E676EDD8A}"/>
+              </a:ext>
+            </a:extLst>
+          </p:cNvPr>
+          <p:cNvSpPr txBox="1"/>
+          <p:nvPr/>
+        </p:nvSpPr>
+        <p:spPr>
+          <a:xfrm>
+            <a:off x="6629401" y="4897279"/>
+            <a:ext cx="2514600" cy="246221"/>
+          </a:xfrm>
+          <a:prstGeom prst="rect">
+            <a:avLst/>
+          </a:prstGeom>
+          <a:noFill/>
+        </p:spPr>
+        <p:txBody>
+          <a:bodyPr wrap="square" rtlCol="0">
+            <a:spAutoFit/>
+          </a:bodyPr>
+          <a:lstStyle/>
+          <a:p>
+            <a:r>
+              <a:rPr lang="en-US" sz="1000" dirty="0">
+                <a:solidFill>
+                  <a:schemeClr val="tx1">
+                    <a:lumMod val="50000"/>
+                    <a:lumOff val="50000"/>
+                  </a:schemeClr>
+                </a:solidFill>
+                <a:latin typeface="Arial" panose="020B0604020202020204" pitchFamily="34" charset="0"/>
+                <a:cs typeface="Arial" panose="020B0604020202020204" pitchFamily="34" charset="0"/>
+              </a:rPr>
+              <a:t>Rapid Response – Updated Sept 2026</a:t>
+            </a:r>
+          </a:p>
+        </p:txBody>
+      </p:sp>
+    </p:spTree>
+  </p:cSld>
+  <p:clrMapOvr>
+    <a:masterClrMapping/>
+  </p:clrMapOvr>
+</p:sld>
+</file>
+
+<file path=ppt/slides/slide3.xml><?xml version="1.0" encoding="utf-8"?>
 <p:sld xmlns:a="http://schemas.openxmlformats.org/drawingml/2006/main" xmlns:r="http://schemas.openxmlformats.org/officeDocument/2006/relationships" xmlns:p="http://schemas.openxmlformats.org/presentationml/2006/main">
   <p:cSld>
     <p:spTree>
@@ -24118,22 +25719,77 @@
               <a:buNone/>
             </a:pPr>
             <a:r>
-              <a:rPr lang="en" sz="2400" b="0" i="0" u="none" strike="noStrike" cap="none">
+              <a:rPr lang="en" sz="2400" b="0" i="0" u="none" strike="noStrike" cap="none" dirty="0">
                 <a:solidFill>
                   <a:schemeClr val="dk1"/>
                 </a:solidFill>
-                <a:latin typeface="Open Sans"/>
+                <a:latin typeface="+mj-lt"/>
                 <a:ea typeface="Open Sans"/>
                 <a:cs typeface="Open Sans"/>
                 <a:sym typeface="Open Sans"/>
               </a:rPr>
-              <a:t>CZ ID is a free platform used to identify microbes of interest from NGS data</a:t>
+              <a:t>CZ ID is a free </a:t>
             </a:r>
-            <a:endParaRPr sz="2400" b="0" i="0" u="none" strike="noStrike" cap="none">
+            <a:r>
+              <a:rPr lang="en" sz="2400" b="0" i="0" u="none" strike="noStrike" cap="none">
+                <a:solidFill>
+                  <a:schemeClr val="dk1"/>
+                </a:solidFill>
+                <a:latin typeface="+mj-lt"/>
+                <a:ea typeface="Open Sans"/>
+                <a:cs typeface="Open Sans"/>
+                <a:sym typeface="Open Sans"/>
+              </a:rPr>
+              <a:t>platform </a:t>
+            </a:r>
+          </a:p>
+          <a:p>
+            <a:pPr marL="0" marR="0" lvl="0" indent="0" algn="ctr" rtl="0">
+              <a:lnSpc>
+                <a:spcPct val="90000"/>
+              </a:lnSpc>
+              <a:spcBef>
+                <a:spcPts val="800"/>
+              </a:spcBef>
+              <a:spcAft>
+                <a:spcPts val="0"/>
+              </a:spcAft>
+              <a:buClr>
+                <a:schemeClr val="dk1"/>
+              </a:buClr>
+              <a:buSzPts val="1100"/>
+              <a:buFont typeface="Arial"/>
+              <a:buNone/>
+            </a:pPr>
+            <a:r>
+              <a:rPr lang="en" sz="2400" b="0" i="0" u="none" strike="noStrike" cap="none">
+                <a:solidFill>
+                  <a:schemeClr val="dk1"/>
+                </a:solidFill>
+                <a:latin typeface="+mj-lt"/>
+                <a:ea typeface="Open Sans"/>
+                <a:cs typeface="Open Sans"/>
+                <a:sym typeface="Open Sans"/>
+              </a:rPr>
+              <a:t>used </a:t>
+            </a:r>
+            <a:r>
+              <a:rPr lang="en" sz="2400" b="0" i="0" u="none" strike="noStrike" cap="none" dirty="0">
+                <a:solidFill>
+                  <a:schemeClr val="dk1"/>
+                </a:solidFill>
+                <a:latin typeface="+mj-lt"/>
+                <a:ea typeface="Open Sans"/>
+                <a:cs typeface="Open Sans"/>
+                <a:sym typeface="Open Sans"/>
+              </a:rPr>
+              <a:t>to identify microbes of interest from NGS data</a:t>
+            </a:r>
+            <a:endParaRPr sz="2400" b="0" i="0" u="none" strike="noStrike" cap="none" dirty="0">
               <a:solidFill>
                 <a:srgbClr val="000000"/>
               </a:solidFill>
-              <a:latin typeface="Open Sans"/>
+              <a:latin typeface="+mj-lt"/>
               <a:ea typeface="Open Sans"/>
               <a:cs typeface="Open Sans"/>
               <a:sym typeface="Open Sans"/>
@@ -24265,7 +25921,7 @@
 </p:sld>
 </file>
 
-<file path=ppt/slides/slide3.xml><?xml version="1.0" encoding="utf-8"?>
+<file path=ppt/slides/slide4.xml><?xml version="1.0" encoding="utf-8"?>
 <p:sld xmlns:a="http://schemas.openxmlformats.org/drawingml/2006/main" xmlns:r="http://schemas.openxmlformats.org/officeDocument/2006/relationships" xmlns:p="http://schemas.openxmlformats.org/presentationml/2006/main">
   <p:cSld>
     <p:spTree>
@@ -25170,7 +26826,7 @@
 </p:sld>
 </file>
 
-<file path=ppt/slides/slide4.xml><?xml version="1.0" encoding="utf-8"?>
+<file path=ppt/slides/slide5.xml><?xml version="1.0" encoding="utf-8"?>
 <p:sld xmlns:a="http://schemas.openxmlformats.org/drawingml/2006/main" xmlns:r="http://schemas.openxmlformats.org/officeDocument/2006/relationships" xmlns:p="http://schemas.openxmlformats.org/presentationml/2006/main">
   <p:cSld>
     <p:spTree>
@@ -25231,7 +26887,7 @@
             </a:pPr>
             <a:fld id="{00000000-1234-1234-1234-123412341234}" type="slidenum">
               <a:rPr lang="en"/>
-              <a:t>4</a:t>
+              <a:t>5</a:t>
             </a:fld>
             <a:endParaRPr/>
           </a:p>
@@ -25280,22 +26936,22 @@
               <a:buNone/>
             </a:pPr>
             <a:r>
-              <a:rPr lang="en" sz="1600" b="0" i="0" u="none" strike="noStrike" cap="none">
+              <a:rPr lang="en" sz="1800" b="0" i="0" u="none" strike="noStrike" cap="none">
                 <a:solidFill>
                   <a:srgbClr val="000000"/>
                 </a:solidFill>
-                <a:latin typeface="Open Sans"/>
+                <a:latin typeface="+mj-lt"/>
                 <a:ea typeface="Open Sans"/>
                 <a:cs typeface="Open Sans"/>
                 <a:sym typeface="Open Sans"/>
               </a:rPr>
               <a:t>NGS data analysis requires computational power and includes MANY steps</a:t>
             </a:r>
-            <a:endParaRPr sz="600" b="0" i="0" u="none" strike="noStrike" cap="none">
+            <a:endParaRPr sz="700" b="0" i="0" u="none" strike="noStrike" cap="none">
               <a:solidFill>
                 <a:srgbClr val="000000"/>
               </a:solidFill>
-              <a:latin typeface="Open Sans"/>
+              <a:latin typeface="+mj-lt"/>
               <a:ea typeface="Open Sans"/>
               <a:cs typeface="Open Sans"/>
               <a:sym typeface="Open Sans"/>
@@ -25502,7 +27158,7 @@
 </p:sld>
 </file>
 
-<file path=ppt/slides/slide5.xml><?xml version="1.0" encoding="utf-8"?>
+<file path=ppt/slides/slide6.xml><?xml version="1.0" encoding="utf-8"?>
 <p:sld xmlns:a="http://schemas.openxmlformats.org/drawingml/2006/main" xmlns:r="http://schemas.openxmlformats.org/officeDocument/2006/relationships" xmlns:p="http://schemas.openxmlformats.org/presentationml/2006/main">
   <p:cSld>
     <p:spTree>
@@ -25562,16 +27218,16 @@
               <a:buNone/>
             </a:pPr>
             <a:r>
-              <a:rPr lang="en">
-                <a:latin typeface="Open Sans"/>
+              <a:rPr lang="en" dirty="0">
+                <a:latin typeface="+mj-lt"/>
                 <a:ea typeface="Open Sans"/>
                 <a:cs typeface="Open Sans"/>
                 <a:sym typeface="Open Sans"/>
               </a:rPr>
               <a:t>CZ ID supports multiple uses</a:t>
             </a:r>
-            <a:endParaRPr>
-              <a:latin typeface="Open Sans"/>
+            <a:endParaRPr dirty="0">
+              <a:latin typeface="+mj-lt"/>
               <a:ea typeface="Open Sans"/>
               <a:cs typeface="Open Sans"/>
               <a:sym typeface="Open Sans"/>
@@ -25659,7 +27315,7 @@
                 <a:solidFill>
                   <a:srgbClr val="000000"/>
                 </a:solidFill>
-                <a:latin typeface="Helvetica Neue"/>
+                <a:latin typeface="+mn-lt"/>
                 <a:ea typeface="Helvetica Neue"/>
                 <a:cs typeface="Helvetica Neue"/>
                 <a:sym typeface="Helvetica Neue"/>
@@ -25670,7 +27326,7 @@
               <a:solidFill>
                 <a:srgbClr val="000000"/>
               </a:solidFill>
-              <a:latin typeface="Helvetica Neue"/>
+              <a:latin typeface="+mn-lt"/>
               <a:ea typeface="Helvetica Neue"/>
               <a:cs typeface="Helvetica Neue"/>
               <a:sym typeface="Helvetica Neue"/>
@@ -25698,7 +27354,7 @@
               <a:solidFill>
                 <a:srgbClr val="000000"/>
               </a:solidFill>
-              <a:latin typeface="Helvetica Neue"/>
+              <a:latin typeface="+mn-lt"/>
               <a:ea typeface="Helvetica Neue"/>
               <a:cs typeface="Helvetica Neue"/>
               <a:sym typeface="Helvetica Neue"/>
@@ -25727,7 +27383,7 @@
                 <a:solidFill>
                   <a:srgbClr val="000000"/>
                 </a:solidFill>
-                <a:latin typeface="Helvetica Neue"/>
+                <a:latin typeface="+mn-lt"/>
                 <a:ea typeface="Helvetica Neue"/>
                 <a:cs typeface="Helvetica Neue"/>
                 <a:sym typeface="Helvetica Neue"/>
@@ -25738,7 +27394,7 @@
               <a:solidFill>
                 <a:srgbClr val="000000"/>
               </a:solidFill>
-              <a:latin typeface="Helvetica Neue"/>
+              <a:latin typeface="+mn-lt"/>
               <a:ea typeface="Helvetica Neue"/>
               <a:cs typeface="Helvetica Neue"/>
               <a:sym typeface="Helvetica Neue"/>
@@ -25766,7 +27422,7 @@
               <a:solidFill>
                 <a:srgbClr val="000000"/>
               </a:solidFill>
-              <a:latin typeface="Helvetica Neue"/>
+              <a:latin typeface="+mn-lt"/>
               <a:ea typeface="Helvetica Neue"/>
               <a:cs typeface="Helvetica Neue"/>
               <a:sym typeface="Helvetica Neue"/>
@@ -25795,7 +27451,7 @@
                 <a:solidFill>
                   <a:srgbClr val="000000"/>
                 </a:solidFill>
-                <a:latin typeface="Helvetica Neue"/>
+                <a:latin typeface="+mn-lt"/>
                 <a:ea typeface="Helvetica Neue"/>
                 <a:cs typeface="Helvetica Neue"/>
                 <a:sym typeface="Helvetica Neue"/>
@@ -25806,7 +27462,7 @@
               <a:solidFill>
                 <a:srgbClr val="000000"/>
               </a:solidFill>
-              <a:latin typeface="Helvetica Neue"/>
+              <a:latin typeface="+mn-lt"/>
               <a:ea typeface="Helvetica Neue"/>
               <a:cs typeface="Helvetica Neue"/>
               <a:sym typeface="Helvetica Neue"/>
@@ -25834,7 +27490,7 @@
               <a:solidFill>
                 <a:srgbClr val="000000"/>
               </a:solidFill>
-              <a:latin typeface="Helvetica Neue"/>
+              <a:latin typeface="+mn-lt"/>
               <a:ea typeface="Helvetica Neue"/>
               <a:cs typeface="Helvetica Neue"/>
               <a:sym typeface="Helvetica Neue"/>
@@ -25863,7 +27519,7 @@
                 <a:solidFill>
                   <a:srgbClr val="000000"/>
                 </a:solidFill>
-                <a:latin typeface="Helvetica Neue"/>
+                <a:latin typeface="+mn-lt"/>
                 <a:ea typeface="Helvetica Neue"/>
                 <a:cs typeface="Helvetica Neue"/>
                 <a:sym typeface="Helvetica Neue"/>
@@ -25874,7 +27530,7 @@
               <a:solidFill>
                 <a:srgbClr val="000000"/>
               </a:solidFill>
-              <a:latin typeface="Helvetica Neue"/>
+              <a:latin typeface="+mn-lt"/>
               <a:ea typeface="Helvetica Neue"/>
               <a:cs typeface="Helvetica Neue"/>
               <a:sym typeface="Helvetica Neue"/>
@@ -25890,7 +27546,1408 @@
 </p:sld>
 </file>
 
-<file path=ppt/slides/slide6.xml><?xml version="1.0" encoding="utf-8"?>
+<file path=ppt/slides/slide7.xml><?xml version="1.0" encoding="utf-8"?>
+<p:sld xmlns:a="http://schemas.openxmlformats.org/drawingml/2006/main" xmlns:r="http://schemas.openxmlformats.org/officeDocument/2006/relationships" xmlns:p="http://schemas.openxmlformats.org/presentationml/2006/main">
+  <p:cSld>
+    <p:spTree>
+      <p:nvGrpSpPr>
+        <p:cNvPr id="1" name=""/>
+        <p:cNvGrpSpPr/>
+        <p:nvPr/>
+      </p:nvGrpSpPr>
+      <p:grpSpPr>
+        <a:xfrm>
+          <a:off x="0" y="0"/>
+          <a:ext cx="0" cy="0"/>
+          <a:chOff x="0" y="0"/>
+          <a:chExt cx="0" cy="0"/>
+        </a:xfrm>
+      </p:grpSpPr>
+      <p:graphicFrame>
+        <p:nvGraphicFramePr>
+          <p:cNvPr id="4" name="Table 3">
+            <a:extLst>
+              <a:ext uri="{FF2B5EF4-FFF2-40B4-BE49-F238E27FC236}">
+                <a16:creationId xmlns:a16="http://schemas.microsoft.com/office/drawing/2014/main" id="{48C561ED-7E2C-2C0F-D3CC-CAD3FA23AF86}"/>
+              </a:ext>
+            </a:extLst>
+          </p:cNvPr>
+          <p:cNvGraphicFramePr>
+            <a:graphicFrameLocks noGrp="1"/>
+          </p:cNvGraphicFramePr>
+          <p:nvPr>
+            <p:extLst>
+              <p:ext uri="{D42A27DB-BD31-4B8C-83A1-F6EECF244321}">
+                <p14:modId xmlns:p14="http://schemas.microsoft.com/office/powerpoint/2010/main" val="427921831"/>
+              </p:ext>
+            </p:extLst>
+          </p:nvPr>
+        </p:nvGraphicFramePr>
+        <p:xfrm>
+          <a:off x="1583656" y="1020277"/>
+          <a:ext cx="5976688" cy="3487005"/>
+        </p:xfrm>
+        <a:graphic>
+          <a:graphicData uri="http://schemas.openxmlformats.org/drawingml/2006/table">
+            <a:tbl>
+              <a:tblPr>
+                <a:tableStyleId>{5C22544A-7EE6-4342-B048-85BDC9FD1C3A}</a:tableStyleId>
+              </a:tblPr>
+              <a:tblGrid>
+                <a:gridCol w="1621285">
+                  <a:extLst>
+                    <a:ext uri="{9D8B030D-6E8A-4147-A177-3AD203B41FA5}">
+                      <a16:colId xmlns:a16="http://schemas.microsoft.com/office/drawing/2014/main" val="3233662737"/>
+                    </a:ext>
+                  </a:extLst>
+                </a:gridCol>
+                <a:gridCol w="2734118">
+                  <a:extLst>
+                    <a:ext uri="{9D8B030D-6E8A-4147-A177-3AD203B41FA5}">
+                      <a16:colId xmlns:a16="http://schemas.microsoft.com/office/drawing/2014/main" val="3483605156"/>
+                    </a:ext>
+                  </a:extLst>
+                </a:gridCol>
+                <a:gridCol w="1621285">
+                  <a:extLst>
+                    <a:ext uri="{9D8B030D-6E8A-4147-A177-3AD203B41FA5}">
+                      <a16:colId xmlns:a16="http://schemas.microsoft.com/office/drawing/2014/main" val="1829298715"/>
+                    </a:ext>
+                  </a:extLst>
+                </a:gridCol>
+              </a:tblGrid>
+              <a:tr h="298884">
+                <a:tc>
+                  <a:txBody>
+                    <a:bodyPr/>
+                    <a:lstStyle/>
+                    <a:p>
+                      <a:pPr algn="ctr" rtl="0" fontAlgn="t">
+                        <a:buNone/>
+                      </a:pPr>
+                      <a:r>
+                        <a:rPr lang="en-US" sz="1100" b="1" u="none" strike="noStrike" dirty="0">
+                          <a:effectLst/>
+                        </a:rPr>
+                        <a:t>Module</a:t>
+                      </a:r>
+                      <a:endParaRPr lang="en-US" sz="1200" b="1" dirty="0">
+                        <a:effectLst/>
+                      </a:endParaRPr>
+                    </a:p>
+                  </a:txBody>
+                  <a:tcPr marL="56393" marR="56393" marT="56393" marB="56393">
+                    <a:lnL w="12700" cap="flat" cmpd="sng" algn="ctr">
+                      <a:solidFill>
+                        <a:schemeClr val="tx1"/>
+                      </a:solidFill>
+                      <a:prstDash val="solid"/>
+                      <a:round/>
+                      <a:headEnd type="none" w="med" len="med"/>
+                      <a:tailEnd type="none" w="med" len="med"/>
+                    </a:lnL>
+                    <a:lnR w="12700" cap="flat" cmpd="sng" algn="ctr">
+                      <a:solidFill>
+                        <a:schemeClr val="tx1"/>
+                      </a:solidFill>
+                      <a:prstDash val="solid"/>
+                      <a:round/>
+                      <a:headEnd type="none" w="med" len="med"/>
+                      <a:tailEnd type="none" w="med" len="med"/>
+                    </a:lnR>
+                    <a:lnT w="12700" cap="flat" cmpd="sng" algn="ctr">
+                      <a:solidFill>
+                        <a:schemeClr val="tx1"/>
+                      </a:solidFill>
+                      <a:prstDash val="solid"/>
+                      <a:round/>
+                      <a:headEnd type="none" w="med" len="med"/>
+                      <a:tailEnd type="none" w="med" len="med"/>
+                    </a:lnT>
+                    <a:lnB w="12700" cap="flat" cmpd="sng" algn="ctr">
+                      <a:solidFill>
+                        <a:schemeClr val="tx1"/>
+                      </a:solidFill>
+                      <a:prstDash val="solid"/>
+                      <a:round/>
+                      <a:headEnd type="none" w="med" len="med"/>
+                      <a:tailEnd type="none" w="med" len="med"/>
+                    </a:lnB>
+                    <a:noFill/>
+                  </a:tcPr>
+                </a:tc>
+                <a:tc>
+                  <a:txBody>
+                    <a:bodyPr/>
+                    <a:lstStyle/>
+                    <a:p>
+                      <a:pPr algn="ctr" rtl="0" fontAlgn="t">
+                        <a:buNone/>
+                      </a:pPr>
+                      <a:r>
+                        <a:rPr lang="en-US" sz="1100" b="1" u="none" strike="noStrike" dirty="0">
+                          <a:effectLst/>
+                        </a:rPr>
+                        <a:t>Input Sequencing Data</a:t>
+                      </a:r>
+                      <a:endParaRPr lang="en-US" sz="1200" b="1" dirty="0">
+                        <a:effectLst/>
+                      </a:endParaRPr>
+                    </a:p>
+                  </a:txBody>
+                  <a:tcPr marL="56393" marR="56393" marT="56393" marB="56393">
+                    <a:lnL w="12700" cap="flat" cmpd="sng" algn="ctr">
+                      <a:solidFill>
+                        <a:schemeClr val="tx1"/>
+                      </a:solidFill>
+                      <a:prstDash val="solid"/>
+                      <a:round/>
+                      <a:headEnd type="none" w="med" len="med"/>
+                      <a:tailEnd type="none" w="med" len="med"/>
+                    </a:lnL>
+                    <a:lnR w="12700" cap="flat" cmpd="sng" algn="ctr">
+                      <a:solidFill>
+                        <a:schemeClr val="tx1"/>
+                      </a:solidFill>
+                      <a:prstDash val="solid"/>
+                      <a:round/>
+                      <a:headEnd type="none" w="med" len="med"/>
+                      <a:tailEnd type="none" w="med" len="med"/>
+                    </a:lnR>
+                    <a:lnT w="12700" cap="flat" cmpd="sng" algn="ctr">
+                      <a:solidFill>
+                        <a:schemeClr val="tx1"/>
+                      </a:solidFill>
+                      <a:prstDash val="solid"/>
+                      <a:round/>
+                      <a:headEnd type="none" w="med" len="med"/>
+                      <a:tailEnd type="none" w="med" len="med"/>
+                    </a:lnT>
+                    <a:lnB w="12700" cap="flat" cmpd="sng" algn="ctr">
+                      <a:solidFill>
+                        <a:schemeClr val="tx1"/>
+                      </a:solidFill>
+                      <a:prstDash val="solid"/>
+                      <a:round/>
+                      <a:headEnd type="none" w="med" len="med"/>
+                      <a:tailEnd type="none" w="med" len="med"/>
+                    </a:lnB>
+                    <a:noFill/>
+                  </a:tcPr>
+                </a:tc>
+                <a:tc>
+                  <a:txBody>
+                    <a:bodyPr/>
+                    <a:lstStyle/>
+                    <a:p>
+                      <a:pPr algn="ctr" rtl="0" fontAlgn="t">
+                        <a:buNone/>
+                      </a:pPr>
+                      <a:r>
+                        <a:rPr lang="en-US" sz="1100" b="1" u="none" strike="noStrike" dirty="0">
+                          <a:effectLst/>
+                        </a:rPr>
+                        <a:t>Supported Data</a:t>
+                      </a:r>
+                      <a:endParaRPr lang="en-US" sz="1200" b="1" dirty="0">
+                        <a:effectLst/>
+                      </a:endParaRPr>
+                    </a:p>
+                  </a:txBody>
+                  <a:tcPr marL="56393" marR="56393" marT="56393" marB="56393">
+                    <a:lnL w="12700" cap="flat" cmpd="sng" algn="ctr">
+                      <a:solidFill>
+                        <a:schemeClr val="tx1"/>
+                      </a:solidFill>
+                      <a:prstDash val="solid"/>
+                      <a:round/>
+                      <a:headEnd type="none" w="med" len="med"/>
+                      <a:tailEnd type="none" w="med" len="med"/>
+                    </a:lnL>
+                    <a:lnR w="12700" cap="flat" cmpd="sng" algn="ctr">
+                      <a:solidFill>
+                        <a:schemeClr val="tx1"/>
+                      </a:solidFill>
+                      <a:prstDash val="solid"/>
+                      <a:round/>
+                      <a:headEnd type="none" w="med" len="med"/>
+                      <a:tailEnd type="none" w="med" len="med"/>
+                    </a:lnR>
+                    <a:lnT w="12700" cap="flat" cmpd="sng" algn="ctr">
+                      <a:solidFill>
+                        <a:schemeClr val="tx1"/>
+                      </a:solidFill>
+                      <a:prstDash val="solid"/>
+                      <a:round/>
+                      <a:headEnd type="none" w="med" len="med"/>
+                      <a:tailEnd type="none" w="med" len="med"/>
+                    </a:lnT>
+                    <a:lnB w="12700" cap="flat" cmpd="sng" algn="ctr">
+                      <a:solidFill>
+                        <a:schemeClr val="tx1"/>
+                      </a:solidFill>
+                      <a:prstDash val="solid"/>
+                      <a:round/>
+                      <a:headEnd type="none" w="med" len="med"/>
+                      <a:tailEnd type="none" w="med" len="med"/>
+                    </a:lnB>
+                    <a:noFill/>
+                  </a:tcPr>
+                </a:tc>
+                <a:extLst>
+                  <a:ext uri="{0D108BD9-81ED-4DB2-BD59-A6C34878D82A}">
+                    <a16:rowId xmlns:a16="http://schemas.microsoft.com/office/drawing/2014/main" val="1120805284"/>
+                  </a:ext>
+                </a:extLst>
+              </a:tr>
+              <a:tr h="1033123">
+                <a:tc>
+                  <a:txBody>
+                    <a:bodyPr/>
+                    <a:lstStyle/>
+                    <a:p>
+                      <a:pPr algn="ctr" rtl="0" fontAlgn="ctr">
+                        <a:buNone/>
+                      </a:pPr>
+                      <a:r>
+                        <a:rPr lang="en-US" sz="1100" u="none" strike="noStrike">
+                          <a:effectLst/>
+                        </a:rPr>
+                        <a:t>Metagenomics (mNGS)</a:t>
+                      </a:r>
+                      <a:endParaRPr lang="en-US" sz="1200">
+                        <a:effectLst/>
+                      </a:endParaRPr>
+                    </a:p>
+                  </a:txBody>
+                  <a:tcPr marL="56393" marR="56393" marT="56393" marB="56393" anchor="ctr">
+                    <a:lnL w="12700" cap="flat" cmpd="sng" algn="ctr">
+                      <a:solidFill>
+                        <a:schemeClr val="tx1"/>
+                      </a:solidFill>
+                      <a:prstDash val="solid"/>
+                      <a:round/>
+                      <a:headEnd type="none" w="med" len="med"/>
+                      <a:tailEnd type="none" w="med" len="med"/>
+                    </a:lnL>
+                    <a:lnR w="12700" cap="flat" cmpd="sng" algn="ctr">
+                      <a:solidFill>
+                        <a:schemeClr val="tx1"/>
+                      </a:solidFill>
+                      <a:prstDash val="solid"/>
+                      <a:round/>
+                      <a:headEnd type="none" w="med" len="med"/>
+                      <a:tailEnd type="none" w="med" len="med"/>
+                    </a:lnR>
+                    <a:lnT w="12700" cap="flat" cmpd="sng" algn="ctr">
+                      <a:solidFill>
+                        <a:schemeClr val="tx1"/>
+                      </a:solidFill>
+                      <a:prstDash val="solid"/>
+                      <a:round/>
+                      <a:headEnd type="none" w="med" len="med"/>
+                      <a:tailEnd type="none" w="med" len="med"/>
+                    </a:lnT>
+                    <a:lnB w="12700" cap="flat" cmpd="sng" algn="ctr">
+                      <a:solidFill>
+                        <a:schemeClr val="tx1"/>
+                      </a:solidFill>
+                      <a:prstDash val="solid"/>
+                      <a:round/>
+                      <a:headEnd type="none" w="med" len="med"/>
+                      <a:tailEnd type="none" w="med" len="med"/>
+                    </a:lnB>
+                    <a:noFill/>
+                  </a:tcPr>
+                </a:tc>
+                <a:tc>
+                  <a:txBody>
+                    <a:bodyPr/>
+                    <a:lstStyle/>
+                    <a:p>
+                      <a:pPr algn="ctr" rtl="0" fontAlgn="t">
+                        <a:spcBef>
+                          <a:spcPts val="1200"/>
+                        </a:spcBef>
+                        <a:spcAft>
+                          <a:spcPts val="1200"/>
+                        </a:spcAft>
+                        <a:buNone/>
+                      </a:pPr>
+                      <a:r>
+                        <a:rPr lang="en-US" sz="1100" u="none" strike="noStrike" dirty="0">
+                          <a:effectLst/>
+                        </a:rPr>
+                        <a:t>Shotgun (or random) data</a:t>
+                      </a:r>
+                      <a:endParaRPr lang="en-US" sz="1200" dirty="0">
+                        <a:effectLst/>
+                      </a:endParaRPr>
+                    </a:p>
+                    <a:p>
+                      <a:pPr algn="ctr" rtl="0" fontAlgn="t">
+                        <a:spcBef>
+                          <a:spcPts val="1200"/>
+                        </a:spcBef>
+                        <a:spcAft>
+                          <a:spcPts val="1200"/>
+                        </a:spcAft>
+                        <a:buNone/>
+                      </a:pPr>
+                      <a:r>
+                        <a:rPr lang="en-US" sz="1100" u="none" strike="noStrike" dirty="0">
+                          <a:effectLst/>
+                        </a:rPr>
+                        <a:t>Note: Module is NOT meant to process amplicon data (e.g., 16S, 18S, ITS) </a:t>
+                      </a:r>
+                      <a:endParaRPr lang="en-US" sz="1200" dirty="0">
+                        <a:effectLst/>
+                      </a:endParaRPr>
+                    </a:p>
+                  </a:txBody>
+                  <a:tcPr marL="56393" marR="56393" marT="56393" marB="56393">
+                    <a:lnL w="12700" cap="flat" cmpd="sng" algn="ctr">
+                      <a:solidFill>
+                        <a:schemeClr val="tx1"/>
+                      </a:solidFill>
+                      <a:prstDash val="solid"/>
+                      <a:round/>
+                      <a:headEnd type="none" w="med" len="med"/>
+                      <a:tailEnd type="none" w="med" len="med"/>
+                    </a:lnL>
+                    <a:lnR w="12700" cap="flat" cmpd="sng" algn="ctr">
+                      <a:solidFill>
+                        <a:schemeClr val="tx1"/>
+                      </a:solidFill>
+                      <a:prstDash val="solid"/>
+                      <a:round/>
+                      <a:headEnd type="none" w="med" len="med"/>
+                      <a:tailEnd type="none" w="med" len="med"/>
+                    </a:lnR>
+                    <a:lnT w="12700" cap="flat" cmpd="sng" algn="ctr">
+                      <a:solidFill>
+                        <a:schemeClr val="tx1"/>
+                      </a:solidFill>
+                      <a:prstDash val="solid"/>
+                      <a:round/>
+                      <a:headEnd type="none" w="med" len="med"/>
+                      <a:tailEnd type="none" w="med" len="med"/>
+                    </a:lnT>
+                    <a:lnB w="12700" cap="flat" cmpd="sng" algn="ctr">
+                      <a:solidFill>
+                        <a:schemeClr val="tx1"/>
+                      </a:solidFill>
+                      <a:prstDash val="solid"/>
+                      <a:round/>
+                      <a:headEnd type="none" w="med" len="med"/>
+                      <a:tailEnd type="none" w="med" len="med"/>
+                    </a:lnB>
+                    <a:noFill/>
+                  </a:tcPr>
+                </a:tc>
+                <a:tc>
+                  <a:txBody>
+                    <a:bodyPr/>
+                    <a:lstStyle/>
+                    <a:p>
+                      <a:pPr algn="ctr" rtl="0" fontAlgn="ctr">
+                        <a:spcBef>
+                          <a:spcPts val="1200"/>
+                        </a:spcBef>
+                        <a:spcAft>
+                          <a:spcPts val="1200"/>
+                        </a:spcAft>
+                        <a:buNone/>
+                      </a:pPr>
+                      <a:r>
+                        <a:rPr lang="en-US" sz="1100" u="none" strike="noStrike">
+                          <a:effectLst/>
+                        </a:rPr>
+                        <a:t>Illumina &amp; Nanopore</a:t>
+                      </a:r>
+                      <a:endParaRPr lang="en-US" sz="1200">
+                        <a:effectLst/>
+                      </a:endParaRPr>
+                    </a:p>
+                  </a:txBody>
+                  <a:tcPr marL="56393" marR="56393" marT="56393" marB="56393" anchor="ctr">
+                    <a:lnL w="12700" cap="flat" cmpd="sng" algn="ctr">
+                      <a:solidFill>
+                        <a:schemeClr val="tx1"/>
+                      </a:solidFill>
+                      <a:prstDash val="solid"/>
+                      <a:round/>
+                      <a:headEnd type="none" w="med" len="med"/>
+                      <a:tailEnd type="none" w="med" len="med"/>
+                    </a:lnL>
+                    <a:lnR w="12700" cap="flat" cmpd="sng" algn="ctr">
+                      <a:solidFill>
+                        <a:schemeClr val="tx1"/>
+                      </a:solidFill>
+                      <a:prstDash val="solid"/>
+                      <a:round/>
+                      <a:headEnd type="none" w="med" len="med"/>
+                      <a:tailEnd type="none" w="med" len="med"/>
+                    </a:lnR>
+                    <a:lnT w="12700" cap="flat" cmpd="sng" algn="ctr">
+                      <a:solidFill>
+                        <a:schemeClr val="tx1"/>
+                      </a:solidFill>
+                      <a:prstDash val="solid"/>
+                      <a:round/>
+                      <a:headEnd type="none" w="med" len="med"/>
+                      <a:tailEnd type="none" w="med" len="med"/>
+                    </a:lnT>
+                    <a:lnB w="12700" cap="flat" cmpd="sng" algn="ctr">
+                      <a:solidFill>
+                        <a:schemeClr val="tx1"/>
+                      </a:solidFill>
+                      <a:prstDash val="solid"/>
+                      <a:round/>
+                      <a:headEnd type="none" w="med" len="med"/>
+                      <a:tailEnd type="none" w="med" len="med"/>
+                    </a:lnB>
+                    <a:noFill/>
+                  </a:tcPr>
+                </a:tc>
+                <a:extLst>
+                  <a:ext uri="{0D108BD9-81ED-4DB2-BD59-A6C34878D82A}">
+                    <a16:rowId xmlns:a16="http://schemas.microsoft.com/office/drawing/2014/main" val="130788838"/>
+                  </a:ext>
+                </a:extLst>
+              </a:tr>
+              <a:tr h="451146">
+                <a:tc>
+                  <a:txBody>
+                    <a:bodyPr/>
+                    <a:lstStyle/>
+                    <a:p>
+                      <a:pPr algn="ctr" rtl="0" fontAlgn="ctr">
+                        <a:buNone/>
+                      </a:pPr>
+                      <a:r>
+                        <a:rPr lang="en-US" sz="1100" u="none" strike="noStrike">
+                          <a:effectLst/>
+                        </a:rPr>
+                        <a:t>Antimicrobial Resistance (AMR)</a:t>
+                      </a:r>
+                      <a:endParaRPr lang="en-US" sz="1200">
+                        <a:effectLst/>
+                      </a:endParaRPr>
+                    </a:p>
+                  </a:txBody>
+                  <a:tcPr marL="56393" marR="56393" marT="56393" marB="56393" anchor="ctr">
+                    <a:lnL w="12700" cap="flat" cmpd="sng" algn="ctr">
+                      <a:solidFill>
+                        <a:schemeClr val="tx1"/>
+                      </a:solidFill>
+                      <a:prstDash val="solid"/>
+                      <a:round/>
+                      <a:headEnd type="none" w="med" len="med"/>
+                      <a:tailEnd type="none" w="med" len="med"/>
+                    </a:lnL>
+                    <a:lnR w="12700" cap="flat" cmpd="sng" algn="ctr">
+                      <a:solidFill>
+                        <a:schemeClr val="tx1"/>
+                      </a:solidFill>
+                      <a:prstDash val="solid"/>
+                      <a:round/>
+                      <a:headEnd type="none" w="med" len="med"/>
+                      <a:tailEnd type="none" w="med" len="med"/>
+                    </a:lnR>
+                    <a:lnT w="12700" cap="flat" cmpd="sng" algn="ctr">
+                      <a:solidFill>
+                        <a:schemeClr val="tx1"/>
+                      </a:solidFill>
+                      <a:prstDash val="solid"/>
+                      <a:round/>
+                      <a:headEnd type="none" w="med" len="med"/>
+                      <a:tailEnd type="none" w="med" len="med"/>
+                    </a:lnT>
+                    <a:lnB w="12700" cap="flat" cmpd="sng" algn="ctr">
+                      <a:solidFill>
+                        <a:schemeClr val="tx1"/>
+                      </a:solidFill>
+                      <a:prstDash val="solid"/>
+                      <a:round/>
+                      <a:headEnd type="none" w="med" len="med"/>
+                      <a:tailEnd type="none" w="med" len="med"/>
+                    </a:lnB>
+                    <a:noFill/>
+                  </a:tcPr>
+                </a:tc>
+                <a:tc>
+                  <a:txBody>
+                    <a:bodyPr/>
+                    <a:lstStyle/>
+                    <a:p>
+                      <a:pPr algn="ctr" rtl="0" fontAlgn="t">
+                        <a:spcBef>
+                          <a:spcPts val="1200"/>
+                        </a:spcBef>
+                        <a:spcAft>
+                          <a:spcPts val="1200"/>
+                        </a:spcAft>
+                        <a:buNone/>
+                      </a:pPr>
+                      <a:r>
+                        <a:rPr lang="en-US" sz="1100" u="none" strike="noStrike">
+                          <a:effectLst/>
+                        </a:rPr>
+                        <a:t>Shotgun (or random) and whole genome sequence data</a:t>
+                      </a:r>
+                      <a:endParaRPr lang="en-US" sz="1200">
+                        <a:effectLst/>
+                      </a:endParaRPr>
+                    </a:p>
+                  </a:txBody>
+                  <a:tcPr marL="56393" marR="56393" marT="56393" marB="56393">
+                    <a:lnL w="12700" cap="flat" cmpd="sng" algn="ctr">
+                      <a:solidFill>
+                        <a:schemeClr val="tx1"/>
+                      </a:solidFill>
+                      <a:prstDash val="solid"/>
+                      <a:round/>
+                      <a:headEnd type="none" w="med" len="med"/>
+                      <a:tailEnd type="none" w="med" len="med"/>
+                    </a:lnL>
+                    <a:lnR w="12700" cap="flat" cmpd="sng" algn="ctr">
+                      <a:solidFill>
+                        <a:schemeClr val="tx1"/>
+                      </a:solidFill>
+                      <a:prstDash val="solid"/>
+                      <a:round/>
+                      <a:headEnd type="none" w="med" len="med"/>
+                      <a:tailEnd type="none" w="med" len="med"/>
+                    </a:lnR>
+                    <a:lnT w="12700" cap="flat" cmpd="sng" algn="ctr">
+                      <a:solidFill>
+                        <a:schemeClr val="tx1"/>
+                      </a:solidFill>
+                      <a:prstDash val="solid"/>
+                      <a:round/>
+                      <a:headEnd type="none" w="med" len="med"/>
+                      <a:tailEnd type="none" w="med" len="med"/>
+                    </a:lnT>
+                    <a:lnB w="12700" cap="flat" cmpd="sng" algn="ctr">
+                      <a:solidFill>
+                        <a:schemeClr val="tx1"/>
+                      </a:solidFill>
+                      <a:prstDash val="solid"/>
+                      <a:round/>
+                      <a:headEnd type="none" w="med" len="med"/>
+                      <a:tailEnd type="none" w="med" len="med"/>
+                    </a:lnB>
+                    <a:noFill/>
+                  </a:tcPr>
+                </a:tc>
+                <a:tc>
+                  <a:txBody>
+                    <a:bodyPr/>
+                    <a:lstStyle/>
+                    <a:p>
+                      <a:pPr algn="ctr" rtl="0" fontAlgn="ctr">
+                        <a:spcBef>
+                          <a:spcPts val="1200"/>
+                        </a:spcBef>
+                        <a:spcAft>
+                          <a:spcPts val="1200"/>
+                        </a:spcAft>
+                        <a:buNone/>
+                      </a:pPr>
+                      <a:r>
+                        <a:rPr lang="en-US" sz="1100" u="none" strike="noStrike" dirty="0">
+                          <a:effectLst/>
+                        </a:rPr>
+                        <a:t>Illumina</a:t>
+                      </a:r>
+                      <a:endParaRPr lang="en-US" sz="1200" dirty="0">
+                        <a:effectLst/>
+                      </a:endParaRPr>
+                    </a:p>
+                  </a:txBody>
+                  <a:tcPr marL="56393" marR="56393" marT="56393" marB="56393" anchor="ctr">
+                    <a:lnL w="12700" cap="flat" cmpd="sng" algn="ctr">
+                      <a:solidFill>
+                        <a:schemeClr val="tx1"/>
+                      </a:solidFill>
+                      <a:prstDash val="solid"/>
+                      <a:round/>
+                      <a:headEnd type="none" w="med" len="med"/>
+                      <a:tailEnd type="none" w="med" len="med"/>
+                    </a:lnL>
+                    <a:lnR w="12700" cap="flat" cmpd="sng" algn="ctr">
+                      <a:solidFill>
+                        <a:schemeClr val="tx1"/>
+                      </a:solidFill>
+                      <a:prstDash val="solid"/>
+                      <a:round/>
+                      <a:headEnd type="none" w="med" len="med"/>
+                      <a:tailEnd type="none" w="med" len="med"/>
+                    </a:lnR>
+                    <a:lnT w="12700" cap="flat" cmpd="sng" algn="ctr">
+                      <a:solidFill>
+                        <a:schemeClr val="tx1"/>
+                      </a:solidFill>
+                      <a:prstDash val="solid"/>
+                      <a:round/>
+                      <a:headEnd type="none" w="med" len="med"/>
+                      <a:tailEnd type="none" w="med" len="med"/>
+                    </a:lnT>
+                    <a:lnB w="12700" cap="flat" cmpd="sng" algn="ctr">
+                      <a:solidFill>
+                        <a:schemeClr val="tx1"/>
+                      </a:solidFill>
+                      <a:prstDash val="solid"/>
+                      <a:round/>
+                      <a:headEnd type="none" w="med" len="med"/>
+                      <a:tailEnd type="none" w="med" len="med"/>
+                    </a:lnB>
+                    <a:noFill/>
+                  </a:tcPr>
+                </a:tc>
+                <a:extLst>
+                  <a:ext uri="{0D108BD9-81ED-4DB2-BD59-A6C34878D82A}">
+                    <a16:rowId xmlns:a16="http://schemas.microsoft.com/office/drawing/2014/main" val="643987676"/>
+                  </a:ext>
+                </a:extLst>
+              </a:tr>
+              <a:tr h="1033123">
+                <a:tc>
+                  <a:txBody>
+                    <a:bodyPr/>
+                    <a:lstStyle/>
+                    <a:p>
+                      <a:pPr algn="ctr" rtl="0" fontAlgn="ctr">
+                        <a:buNone/>
+                      </a:pPr>
+                      <a:r>
+                        <a:rPr lang="en-US" sz="1100" u="none" strike="noStrike">
+                          <a:effectLst/>
+                        </a:rPr>
+                        <a:t>SARS-CoV-2</a:t>
+                      </a:r>
+                      <a:endParaRPr lang="en-US" sz="1200">
+                        <a:effectLst/>
+                      </a:endParaRPr>
+                    </a:p>
+                  </a:txBody>
+                  <a:tcPr marL="56393" marR="56393" marT="56393" marB="56393" anchor="ctr">
+                    <a:lnL w="12700" cap="flat" cmpd="sng" algn="ctr">
+                      <a:solidFill>
+                        <a:schemeClr val="tx1"/>
+                      </a:solidFill>
+                      <a:prstDash val="solid"/>
+                      <a:round/>
+                      <a:headEnd type="none" w="med" len="med"/>
+                      <a:tailEnd type="none" w="med" len="med"/>
+                    </a:lnL>
+                    <a:lnR w="12700" cap="flat" cmpd="sng" algn="ctr">
+                      <a:solidFill>
+                        <a:schemeClr val="tx1"/>
+                      </a:solidFill>
+                      <a:prstDash val="solid"/>
+                      <a:round/>
+                      <a:headEnd type="none" w="med" len="med"/>
+                      <a:tailEnd type="none" w="med" len="med"/>
+                    </a:lnR>
+                    <a:lnT w="12700" cap="flat" cmpd="sng" algn="ctr">
+                      <a:solidFill>
+                        <a:schemeClr val="tx1"/>
+                      </a:solidFill>
+                      <a:prstDash val="solid"/>
+                      <a:round/>
+                      <a:headEnd type="none" w="med" len="med"/>
+                      <a:tailEnd type="none" w="med" len="med"/>
+                    </a:lnT>
+                    <a:lnB w="12700" cap="flat" cmpd="sng" algn="ctr">
+                      <a:solidFill>
+                        <a:schemeClr val="tx1"/>
+                      </a:solidFill>
+                      <a:prstDash val="solid"/>
+                      <a:round/>
+                      <a:headEnd type="none" w="med" len="med"/>
+                      <a:tailEnd type="none" w="med" len="med"/>
+                    </a:lnB>
+                    <a:noFill/>
+                  </a:tcPr>
+                </a:tc>
+                <a:tc>
+                  <a:txBody>
+                    <a:bodyPr/>
+                    <a:lstStyle/>
+                    <a:p>
+                      <a:pPr algn="ctr" rtl="0" fontAlgn="t">
+                        <a:spcBef>
+                          <a:spcPts val="1200"/>
+                        </a:spcBef>
+                        <a:spcAft>
+                          <a:spcPts val="1200"/>
+                        </a:spcAft>
+                        <a:buNone/>
+                      </a:pPr>
+                      <a:r>
+                        <a:rPr lang="en-US" sz="1100" u="none" strike="noStrike" dirty="0">
+                          <a:effectLst/>
+                        </a:rPr>
+                        <a:t>Metagenomic sequencing with spiked primer enrichment (MSSPE) and amplicon-based data</a:t>
+                      </a:r>
+                      <a:endParaRPr lang="en-US" sz="1200" dirty="0">
+                        <a:effectLst/>
+                      </a:endParaRPr>
+                    </a:p>
+                    <a:p>
+                      <a:pPr algn="ctr" rtl="0" fontAlgn="t">
+                        <a:spcBef>
+                          <a:spcPts val="1200"/>
+                        </a:spcBef>
+                        <a:spcAft>
+                          <a:spcPts val="1200"/>
+                        </a:spcAft>
+                        <a:buNone/>
+                      </a:pPr>
+                      <a:r>
+                        <a:rPr lang="en-US" sz="1100" u="none" strike="noStrike" dirty="0">
+                          <a:effectLst/>
+                        </a:rPr>
+                        <a:t>(e.g., ARTIC v3 protocol)</a:t>
+                      </a:r>
+                      <a:endParaRPr lang="en-US" sz="1200" dirty="0">
+                        <a:effectLst/>
+                      </a:endParaRPr>
+                    </a:p>
+                  </a:txBody>
+                  <a:tcPr marL="56393" marR="56393" marT="56393" marB="56393">
+                    <a:lnL w="12700" cap="flat" cmpd="sng" algn="ctr">
+                      <a:solidFill>
+                        <a:schemeClr val="tx1"/>
+                      </a:solidFill>
+                      <a:prstDash val="solid"/>
+                      <a:round/>
+                      <a:headEnd type="none" w="med" len="med"/>
+                      <a:tailEnd type="none" w="med" len="med"/>
+                    </a:lnL>
+                    <a:lnR w="12700" cap="flat" cmpd="sng" algn="ctr">
+                      <a:solidFill>
+                        <a:schemeClr val="tx1"/>
+                      </a:solidFill>
+                      <a:prstDash val="solid"/>
+                      <a:round/>
+                      <a:headEnd type="none" w="med" len="med"/>
+                      <a:tailEnd type="none" w="med" len="med"/>
+                    </a:lnR>
+                    <a:lnT w="12700" cap="flat" cmpd="sng" algn="ctr">
+                      <a:solidFill>
+                        <a:schemeClr val="tx1"/>
+                      </a:solidFill>
+                      <a:prstDash val="solid"/>
+                      <a:round/>
+                      <a:headEnd type="none" w="med" len="med"/>
+                      <a:tailEnd type="none" w="med" len="med"/>
+                    </a:lnT>
+                    <a:lnB w="12700" cap="flat" cmpd="sng" algn="ctr">
+                      <a:solidFill>
+                        <a:schemeClr val="tx1"/>
+                      </a:solidFill>
+                      <a:prstDash val="solid"/>
+                      <a:round/>
+                      <a:headEnd type="none" w="med" len="med"/>
+                      <a:tailEnd type="none" w="med" len="med"/>
+                    </a:lnB>
+                    <a:noFill/>
+                  </a:tcPr>
+                </a:tc>
+                <a:tc>
+                  <a:txBody>
+                    <a:bodyPr/>
+                    <a:lstStyle/>
+                    <a:p>
+                      <a:pPr algn="ctr" rtl="0" fontAlgn="ctr">
+                        <a:spcBef>
+                          <a:spcPts val="1200"/>
+                        </a:spcBef>
+                        <a:spcAft>
+                          <a:spcPts val="1200"/>
+                        </a:spcAft>
+                        <a:buNone/>
+                      </a:pPr>
+                      <a:r>
+                        <a:rPr lang="en-US" sz="1100" u="none" strike="noStrike">
+                          <a:effectLst/>
+                        </a:rPr>
+                        <a:t>Illumina &amp; Nanopore</a:t>
+                      </a:r>
+                      <a:endParaRPr lang="en-US" sz="1200">
+                        <a:effectLst/>
+                      </a:endParaRPr>
+                    </a:p>
+                  </a:txBody>
+                  <a:tcPr marL="56393" marR="56393" marT="56393" marB="56393" anchor="ctr">
+                    <a:lnL w="12700" cap="flat" cmpd="sng" algn="ctr">
+                      <a:solidFill>
+                        <a:schemeClr val="tx1"/>
+                      </a:solidFill>
+                      <a:prstDash val="solid"/>
+                      <a:round/>
+                      <a:headEnd type="none" w="med" len="med"/>
+                      <a:tailEnd type="none" w="med" len="med"/>
+                    </a:lnL>
+                    <a:lnR w="12700" cap="flat" cmpd="sng" algn="ctr">
+                      <a:solidFill>
+                        <a:schemeClr val="tx1"/>
+                      </a:solidFill>
+                      <a:prstDash val="solid"/>
+                      <a:round/>
+                      <a:headEnd type="none" w="med" len="med"/>
+                      <a:tailEnd type="none" w="med" len="med"/>
+                    </a:lnR>
+                    <a:lnT w="12700" cap="flat" cmpd="sng" algn="ctr">
+                      <a:solidFill>
+                        <a:schemeClr val="tx1"/>
+                      </a:solidFill>
+                      <a:prstDash val="solid"/>
+                      <a:round/>
+                      <a:headEnd type="none" w="med" len="med"/>
+                      <a:tailEnd type="none" w="med" len="med"/>
+                    </a:lnT>
+                    <a:lnB w="12700" cap="flat" cmpd="sng" algn="ctr">
+                      <a:solidFill>
+                        <a:schemeClr val="tx1"/>
+                      </a:solidFill>
+                      <a:prstDash val="solid"/>
+                      <a:round/>
+                      <a:headEnd type="none" w="med" len="med"/>
+                      <a:tailEnd type="none" w="med" len="med"/>
+                    </a:lnB>
+                    <a:noFill/>
+                  </a:tcPr>
+                </a:tc>
+                <a:extLst>
+                  <a:ext uri="{0D108BD9-81ED-4DB2-BD59-A6C34878D82A}">
+                    <a16:rowId xmlns:a16="http://schemas.microsoft.com/office/drawing/2014/main" val="49606333"/>
+                  </a:ext>
+                </a:extLst>
+              </a:tr>
+              <a:tr h="600024">
+                <a:tc>
+                  <a:txBody>
+                    <a:bodyPr/>
+                    <a:lstStyle/>
+                    <a:p>
+                      <a:pPr algn="ctr" rtl="0" fontAlgn="ctr">
+                        <a:spcBef>
+                          <a:spcPts val="1200"/>
+                        </a:spcBef>
+                        <a:spcAft>
+                          <a:spcPts val="1200"/>
+                        </a:spcAft>
+                        <a:buNone/>
+                      </a:pPr>
+                      <a:r>
+                        <a:rPr lang="en-US" sz="1100" u="none" strike="noStrike">
+                          <a:effectLst/>
+                        </a:rPr>
+                        <a:t>Viral Consensus Genomes</a:t>
+                      </a:r>
+                      <a:endParaRPr lang="en-US" sz="1200">
+                        <a:effectLst/>
+                      </a:endParaRPr>
+                    </a:p>
+                  </a:txBody>
+                  <a:tcPr marL="56393" marR="56393" marT="56393" marB="56393" anchor="ctr">
+                    <a:lnL w="12700" cap="flat" cmpd="sng" algn="ctr">
+                      <a:solidFill>
+                        <a:schemeClr val="tx1"/>
+                      </a:solidFill>
+                      <a:prstDash val="solid"/>
+                      <a:round/>
+                      <a:headEnd type="none" w="med" len="med"/>
+                      <a:tailEnd type="none" w="med" len="med"/>
+                    </a:lnL>
+                    <a:lnR w="12700" cap="flat" cmpd="sng" algn="ctr">
+                      <a:solidFill>
+                        <a:schemeClr val="tx1"/>
+                      </a:solidFill>
+                      <a:prstDash val="solid"/>
+                      <a:round/>
+                      <a:headEnd type="none" w="med" len="med"/>
+                      <a:tailEnd type="none" w="med" len="med"/>
+                    </a:lnR>
+                    <a:lnT w="12700" cap="flat" cmpd="sng" algn="ctr">
+                      <a:solidFill>
+                        <a:schemeClr val="tx1"/>
+                      </a:solidFill>
+                      <a:prstDash val="solid"/>
+                      <a:round/>
+                      <a:headEnd type="none" w="med" len="med"/>
+                      <a:tailEnd type="none" w="med" len="med"/>
+                    </a:lnT>
+                    <a:lnB w="12700" cap="flat" cmpd="sng" algn="ctr">
+                      <a:solidFill>
+                        <a:schemeClr val="tx1"/>
+                      </a:solidFill>
+                      <a:prstDash val="solid"/>
+                      <a:round/>
+                      <a:headEnd type="none" w="med" len="med"/>
+                      <a:tailEnd type="none" w="med" len="med"/>
+                    </a:lnB>
+                    <a:noFill/>
+                  </a:tcPr>
+                </a:tc>
+                <a:tc>
+                  <a:txBody>
+                    <a:bodyPr/>
+                    <a:lstStyle/>
+                    <a:p>
+                      <a:pPr algn="ctr" rtl="0" fontAlgn="t">
+                        <a:spcBef>
+                          <a:spcPts val="1200"/>
+                        </a:spcBef>
+                        <a:spcAft>
+                          <a:spcPts val="1200"/>
+                        </a:spcAft>
+                        <a:buNone/>
+                      </a:pPr>
+                      <a:r>
+                        <a:rPr lang="en-US" sz="1100" u="none" strike="noStrike" dirty="0">
+                          <a:effectLst/>
+                        </a:rPr>
+                        <a:t>Target enrichment (e.g., MSSPE), PCR amplicon, whole genome, or metagenomic sequencing data</a:t>
+                      </a:r>
+                      <a:endParaRPr lang="en-US" sz="1200" dirty="0">
+                        <a:effectLst/>
+                      </a:endParaRPr>
+                    </a:p>
+                  </a:txBody>
+                  <a:tcPr marL="56393" marR="56393" marT="56393" marB="56393">
+                    <a:lnL w="12700" cap="flat" cmpd="sng" algn="ctr">
+                      <a:solidFill>
+                        <a:schemeClr val="tx1"/>
+                      </a:solidFill>
+                      <a:prstDash val="solid"/>
+                      <a:round/>
+                      <a:headEnd type="none" w="med" len="med"/>
+                      <a:tailEnd type="none" w="med" len="med"/>
+                    </a:lnL>
+                    <a:lnR w="12700" cap="flat" cmpd="sng" algn="ctr">
+                      <a:solidFill>
+                        <a:schemeClr val="tx1"/>
+                      </a:solidFill>
+                      <a:prstDash val="solid"/>
+                      <a:round/>
+                      <a:headEnd type="none" w="med" len="med"/>
+                      <a:tailEnd type="none" w="med" len="med"/>
+                    </a:lnR>
+                    <a:lnT w="12700" cap="flat" cmpd="sng" algn="ctr">
+                      <a:solidFill>
+                        <a:schemeClr val="tx1"/>
+                      </a:solidFill>
+                      <a:prstDash val="solid"/>
+                      <a:round/>
+                      <a:headEnd type="none" w="med" len="med"/>
+                      <a:tailEnd type="none" w="med" len="med"/>
+                    </a:lnT>
+                    <a:lnB w="12700" cap="flat" cmpd="sng" algn="ctr">
+                      <a:solidFill>
+                        <a:schemeClr val="tx1"/>
+                      </a:solidFill>
+                      <a:prstDash val="solid"/>
+                      <a:round/>
+                      <a:headEnd type="none" w="med" len="med"/>
+                      <a:tailEnd type="none" w="med" len="med"/>
+                    </a:lnB>
+                    <a:noFill/>
+                  </a:tcPr>
+                </a:tc>
+                <a:tc>
+                  <a:txBody>
+                    <a:bodyPr/>
+                    <a:lstStyle/>
+                    <a:p>
+                      <a:pPr algn="ctr" rtl="0" fontAlgn="ctr">
+                        <a:spcBef>
+                          <a:spcPts val="1200"/>
+                        </a:spcBef>
+                        <a:spcAft>
+                          <a:spcPts val="1200"/>
+                        </a:spcAft>
+                        <a:buNone/>
+                      </a:pPr>
+                      <a:r>
+                        <a:rPr lang="en-US" sz="1100" u="none" strike="noStrike" dirty="0">
+                          <a:effectLst/>
+                        </a:rPr>
+                        <a:t>Illumina</a:t>
+                      </a:r>
+                      <a:endParaRPr lang="en-US" sz="1200" dirty="0">
+                        <a:effectLst/>
+                      </a:endParaRPr>
+                    </a:p>
+                  </a:txBody>
+                  <a:tcPr marL="56393" marR="56393" marT="56393" marB="56393" anchor="ctr">
+                    <a:lnL w="12700" cap="flat" cmpd="sng" algn="ctr">
+                      <a:solidFill>
+                        <a:schemeClr val="tx1"/>
+                      </a:solidFill>
+                      <a:prstDash val="solid"/>
+                      <a:round/>
+                      <a:headEnd type="none" w="med" len="med"/>
+                      <a:tailEnd type="none" w="med" len="med"/>
+                    </a:lnL>
+                    <a:lnR w="12700" cap="flat" cmpd="sng" algn="ctr">
+                      <a:solidFill>
+                        <a:schemeClr val="tx1"/>
+                      </a:solidFill>
+                      <a:prstDash val="solid"/>
+                      <a:round/>
+                      <a:headEnd type="none" w="med" len="med"/>
+                      <a:tailEnd type="none" w="med" len="med"/>
+                    </a:lnR>
+                    <a:lnT w="12700" cap="flat" cmpd="sng" algn="ctr">
+                      <a:solidFill>
+                        <a:schemeClr val="tx1"/>
+                      </a:solidFill>
+                      <a:prstDash val="solid"/>
+                      <a:round/>
+                      <a:headEnd type="none" w="med" len="med"/>
+                      <a:tailEnd type="none" w="med" len="med"/>
+                    </a:lnT>
+                    <a:lnB w="12700" cap="flat" cmpd="sng" algn="ctr">
+                      <a:solidFill>
+                        <a:schemeClr val="tx1"/>
+                      </a:solidFill>
+                      <a:prstDash val="solid"/>
+                      <a:round/>
+                      <a:headEnd type="none" w="med" len="med"/>
+                      <a:tailEnd type="none" w="med" len="med"/>
+                    </a:lnB>
+                    <a:noFill/>
+                  </a:tcPr>
+                </a:tc>
+                <a:extLst>
+                  <a:ext uri="{0D108BD9-81ED-4DB2-BD59-A6C34878D82A}">
+                    <a16:rowId xmlns:a16="http://schemas.microsoft.com/office/drawing/2014/main" val="849826426"/>
+                  </a:ext>
+                </a:extLst>
+              </a:tr>
+            </a:tbl>
+          </a:graphicData>
+        </a:graphic>
+      </p:graphicFrame>
+      <p:sp>
+        <p:nvSpPr>
+          <p:cNvPr id="7" name="Google Shape;163;p5">
+            <a:extLst>
+              <a:ext uri="{FF2B5EF4-FFF2-40B4-BE49-F238E27FC236}">
+                <a16:creationId xmlns:a16="http://schemas.microsoft.com/office/drawing/2014/main" id="{2B472FDF-2D14-09F4-53F9-B844AA4DC766}"/>
+              </a:ext>
+            </a:extLst>
+          </p:cNvPr>
+          <p:cNvSpPr txBox="1">
+            <a:spLocks/>
+          </p:cNvSpPr>
+          <p:nvPr/>
+        </p:nvSpPr>
+        <p:spPr>
+          <a:xfrm>
+            <a:off x="311700" y="140225"/>
+            <a:ext cx="8520600" cy="572700"/>
+          </a:xfrm>
+          <a:prstGeom prst="rect">
+            <a:avLst/>
+          </a:prstGeom>
+          <a:noFill/>
+          <a:ln>
+            <a:noFill/>
+          </a:ln>
+        </p:spPr>
+        <p:txBody>
+          <a:bodyPr spcFirstLastPara="1" wrap="square" lIns="91425" tIns="91425" rIns="91425" bIns="91425" anchor="t" anchorCtr="0">
+            <a:normAutofit fontScale="97500"/>
+          </a:bodyPr>
+          <a:lstStyle>
+            <a:defPPr marR="0" lvl="0" algn="l" rtl="0">
+              <a:lnSpc>
+                <a:spcPct val="100000"/>
+              </a:lnSpc>
+              <a:spcBef>
+                <a:spcPts val="0"/>
+              </a:spcBef>
+              <a:spcAft>
+                <a:spcPts val="0"/>
+              </a:spcAft>
+            </a:defPPr>
+            <a:lvl1pPr marR="0" lvl="0" algn="l" rtl="0">
+              <a:lnSpc>
+                <a:spcPct val="100000"/>
+              </a:lnSpc>
+              <a:spcBef>
+                <a:spcPts val="0"/>
+              </a:spcBef>
+              <a:spcAft>
+                <a:spcPts val="0"/>
+              </a:spcAft>
+              <a:buClr>
+                <a:schemeClr val="dk1"/>
+              </a:buClr>
+              <a:buSzPts val="2800"/>
+              <a:buFont typeface="Arial"/>
+              <a:buNone/>
+              <a:defRPr sz="2800" b="0" i="0" u="none" strike="noStrike" cap="none">
+                <a:solidFill>
+                  <a:schemeClr val="dk1"/>
+                </a:solidFill>
+                <a:latin typeface="Arial"/>
+                <a:ea typeface="Arial"/>
+                <a:cs typeface="Arial"/>
+                <a:sym typeface="Arial"/>
+              </a:defRPr>
+            </a:lvl1pPr>
+            <a:lvl2pPr marR="0" lvl="1" algn="l" rtl="0">
+              <a:lnSpc>
+                <a:spcPct val="100000"/>
+              </a:lnSpc>
+              <a:spcBef>
+                <a:spcPts val="0"/>
+              </a:spcBef>
+              <a:spcAft>
+                <a:spcPts val="0"/>
+              </a:spcAft>
+              <a:buClr>
+                <a:schemeClr val="dk1"/>
+              </a:buClr>
+              <a:buSzPts val="2800"/>
+              <a:buFont typeface="Arial"/>
+              <a:buNone/>
+              <a:defRPr sz="2800" b="0" i="0" u="none" strike="noStrike" cap="none">
+                <a:solidFill>
+                  <a:schemeClr val="dk1"/>
+                </a:solidFill>
+                <a:latin typeface="Arial"/>
+                <a:ea typeface="Arial"/>
+                <a:cs typeface="Arial"/>
+                <a:sym typeface="Arial"/>
+              </a:defRPr>
+            </a:lvl2pPr>
+            <a:lvl3pPr marR="0" lvl="2" algn="l" rtl="0">
+              <a:lnSpc>
+                <a:spcPct val="100000"/>
+              </a:lnSpc>
+              <a:spcBef>
+                <a:spcPts val="0"/>
+              </a:spcBef>
+              <a:spcAft>
+                <a:spcPts val="0"/>
+              </a:spcAft>
+              <a:buClr>
+                <a:schemeClr val="dk1"/>
+              </a:buClr>
+              <a:buSzPts val="2800"/>
+              <a:buFont typeface="Arial"/>
+              <a:buNone/>
+              <a:defRPr sz="2800" b="0" i="0" u="none" strike="noStrike" cap="none">
+                <a:solidFill>
+                  <a:schemeClr val="dk1"/>
+                </a:solidFill>
+                <a:latin typeface="Arial"/>
+                <a:ea typeface="Arial"/>
+                <a:cs typeface="Arial"/>
+                <a:sym typeface="Arial"/>
+              </a:defRPr>
+            </a:lvl3pPr>
+            <a:lvl4pPr marR="0" lvl="3" algn="l" rtl="0">
+              <a:lnSpc>
+                <a:spcPct val="100000"/>
+              </a:lnSpc>
+              <a:spcBef>
+                <a:spcPts val="0"/>
+              </a:spcBef>
+              <a:spcAft>
+                <a:spcPts val="0"/>
+              </a:spcAft>
+              <a:buClr>
+                <a:schemeClr val="dk1"/>
+              </a:buClr>
+              <a:buSzPts val="2800"/>
+              <a:buFont typeface="Arial"/>
+              <a:buNone/>
+              <a:defRPr sz="2800" b="0" i="0" u="none" strike="noStrike" cap="none">
+                <a:solidFill>
+                  <a:schemeClr val="dk1"/>
+                </a:solidFill>
+                <a:latin typeface="Arial"/>
+                <a:ea typeface="Arial"/>
+                <a:cs typeface="Arial"/>
+                <a:sym typeface="Arial"/>
+              </a:defRPr>
+            </a:lvl4pPr>
+            <a:lvl5pPr marR="0" lvl="4" algn="l" rtl="0">
+              <a:lnSpc>
+                <a:spcPct val="100000"/>
+              </a:lnSpc>
+              <a:spcBef>
+                <a:spcPts val="0"/>
+              </a:spcBef>
+              <a:spcAft>
+                <a:spcPts val="0"/>
+              </a:spcAft>
+              <a:buClr>
+                <a:schemeClr val="dk1"/>
+              </a:buClr>
+              <a:buSzPts val="2800"/>
+              <a:buFont typeface="Arial"/>
+              <a:buNone/>
+              <a:defRPr sz="2800" b="0" i="0" u="none" strike="noStrike" cap="none">
+                <a:solidFill>
+                  <a:schemeClr val="dk1"/>
+                </a:solidFill>
+                <a:latin typeface="Arial"/>
+                <a:ea typeface="Arial"/>
+                <a:cs typeface="Arial"/>
+                <a:sym typeface="Arial"/>
+              </a:defRPr>
+            </a:lvl5pPr>
+            <a:lvl6pPr marR="0" lvl="5" algn="l" rtl="0">
+              <a:lnSpc>
+                <a:spcPct val="100000"/>
+              </a:lnSpc>
+              <a:spcBef>
+                <a:spcPts val="0"/>
+              </a:spcBef>
+              <a:spcAft>
+                <a:spcPts val="0"/>
+              </a:spcAft>
+              <a:buClr>
+                <a:schemeClr val="dk1"/>
+              </a:buClr>
+              <a:buSzPts val="2800"/>
+              <a:buFont typeface="Arial"/>
+              <a:buNone/>
+              <a:defRPr sz="2800" b="0" i="0" u="none" strike="noStrike" cap="none">
+                <a:solidFill>
+                  <a:schemeClr val="dk1"/>
+                </a:solidFill>
+                <a:latin typeface="Arial"/>
+                <a:ea typeface="Arial"/>
+                <a:cs typeface="Arial"/>
+                <a:sym typeface="Arial"/>
+              </a:defRPr>
+            </a:lvl6pPr>
+            <a:lvl7pPr marR="0" lvl="6" algn="l" rtl="0">
+              <a:lnSpc>
+                <a:spcPct val="100000"/>
+              </a:lnSpc>
+              <a:spcBef>
+                <a:spcPts val="0"/>
+              </a:spcBef>
+              <a:spcAft>
+                <a:spcPts val="0"/>
+              </a:spcAft>
+              <a:buClr>
+                <a:schemeClr val="dk1"/>
+              </a:buClr>
+              <a:buSzPts val="2800"/>
+              <a:buFont typeface="Arial"/>
+              <a:buNone/>
+              <a:defRPr sz="2800" b="0" i="0" u="none" strike="noStrike" cap="none">
+                <a:solidFill>
+                  <a:schemeClr val="dk1"/>
+                </a:solidFill>
+                <a:latin typeface="Arial"/>
+                <a:ea typeface="Arial"/>
+                <a:cs typeface="Arial"/>
+                <a:sym typeface="Arial"/>
+              </a:defRPr>
+            </a:lvl7pPr>
+            <a:lvl8pPr marR="0" lvl="7" algn="l" rtl="0">
+              <a:lnSpc>
+                <a:spcPct val="100000"/>
+              </a:lnSpc>
+              <a:spcBef>
+                <a:spcPts val="0"/>
+              </a:spcBef>
+              <a:spcAft>
+                <a:spcPts val="0"/>
+              </a:spcAft>
+              <a:buClr>
+                <a:schemeClr val="dk1"/>
+              </a:buClr>
+              <a:buSzPts val="2800"/>
+              <a:buFont typeface="Arial"/>
+              <a:buNone/>
+              <a:defRPr sz="2800" b="0" i="0" u="none" strike="noStrike" cap="none">
+                <a:solidFill>
+                  <a:schemeClr val="dk1"/>
+                </a:solidFill>
+                <a:latin typeface="Arial"/>
+                <a:ea typeface="Arial"/>
+                <a:cs typeface="Arial"/>
+                <a:sym typeface="Arial"/>
+              </a:defRPr>
+            </a:lvl8pPr>
+            <a:lvl9pPr marR="0" lvl="8" algn="l" rtl="0">
+              <a:lnSpc>
+                <a:spcPct val="100000"/>
+              </a:lnSpc>
+              <a:spcBef>
+                <a:spcPts val="0"/>
+              </a:spcBef>
+              <a:spcAft>
+                <a:spcPts val="0"/>
+              </a:spcAft>
+              <a:buClr>
+                <a:schemeClr val="dk1"/>
+              </a:buClr>
+              <a:buSzPts val="2800"/>
+              <a:buFont typeface="Arial"/>
+              <a:buNone/>
+              <a:defRPr sz="2800" b="0" i="0" u="none" strike="noStrike" cap="none">
+                <a:solidFill>
+                  <a:schemeClr val="dk1"/>
+                </a:solidFill>
+                <a:latin typeface="Arial"/>
+                <a:ea typeface="Arial"/>
+                <a:cs typeface="Arial"/>
+                <a:sym typeface="Arial"/>
+              </a:defRPr>
+            </a:lvl9pPr>
+          </a:lstStyle>
+          <a:p>
+            <a:pPr algn="ctr">
+              <a:buSzPct val="111111"/>
+            </a:pPr>
+            <a:r>
+              <a:rPr lang="en-US" sz="2500">
+                <a:latin typeface="+mj-lt"/>
+                <a:ea typeface="Open Sans"/>
+                <a:cs typeface="Open Sans"/>
+                <a:sym typeface="Open Sans"/>
+              </a:rPr>
+              <a:t>CZ ID supports multiple uses</a:t>
+            </a:r>
+            <a:endParaRPr lang="en-US" sz="2500" dirty="0">
+              <a:latin typeface="+mj-lt"/>
+              <a:ea typeface="Open Sans"/>
+              <a:cs typeface="Open Sans"/>
+              <a:sym typeface="Open Sans"/>
+            </a:endParaRPr>
+          </a:p>
+        </p:txBody>
+      </p:sp>
+    </p:spTree>
+    <p:extLst>
+      <p:ext uri="{BB962C8B-B14F-4D97-AF65-F5344CB8AC3E}">
+        <p14:creationId xmlns:p14="http://schemas.microsoft.com/office/powerpoint/2010/main" val="1811737014"/>
+      </p:ext>
+    </p:extLst>
+  </p:cSld>
+  <p:clrMapOvr>
+    <a:masterClrMapping/>
+  </p:clrMapOvr>
+</p:sld>
+</file>
+
+<file path=ppt/slides/slide8.xml><?xml version="1.0" encoding="utf-8"?>
 <p:sld xmlns:a="http://schemas.openxmlformats.org/drawingml/2006/main" xmlns:r="http://schemas.openxmlformats.org/officeDocument/2006/relationships" xmlns:p="http://schemas.openxmlformats.org/presentationml/2006/main">
   <p:cSld>
     <p:spTree>
@@ -25951,7 +29008,7 @@
             </a:pPr>
             <a:r>
               <a:rPr lang="en">
-                <a:latin typeface="Open Sans"/>
+                <a:latin typeface="+mj-lt"/>
                 <a:ea typeface="Open Sans"/>
                 <a:cs typeface="Open Sans"/>
                 <a:sym typeface="Open Sans"/>
@@ -25959,7 +29016,7 @@
               <a:t>CZ ID supports multiple uses</a:t>
             </a:r>
             <a:endParaRPr>
-              <a:latin typeface="Open Sans"/>
+              <a:latin typeface="+mj-lt"/>
               <a:ea typeface="Open Sans"/>
               <a:cs typeface="Open Sans"/>
               <a:sym typeface="Open Sans"/>
@@ -26338,7 +29395,7 @@
 </p:sld>
 </file>
 
-<file path=ppt/slides/slide7.xml><?xml version="1.0" encoding="utf-8"?>
+<file path=ppt/slides/slide9.xml><?xml version="1.0" encoding="utf-8"?>
 <p:sld xmlns:a="http://schemas.openxmlformats.org/drawingml/2006/main" xmlns:r="http://schemas.openxmlformats.org/officeDocument/2006/relationships" xmlns:p="http://schemas.openxmlformats.org/presentationml/2006/main">
   <p:cSld>
     <p:spTree>
@@ -26398,10 +29455,34 @@
               <a:buNone/>
             </a:pPr>
             <a:r>
-              <a:rPr lang="en"/>
-              <a:t>CZ ID mNGS Analysis Highlights</a:t>
+              <a:rPr lang="en" dirty="0">
+                <a:latin typeface="+mj-lt"/>
+                <a:ea typeface="Open Sans" panose="020B0606030504020204" pitchFamily="34" charset="0"/>
+                <a:cs typeface="Open Sans" panose="020B0606030504020204" pitchFamily="34" charset="0"/>
+              </a:rPr>
+              <a:t>CZ ID </a:t>
             </a:r>
-            <a:endParaRPr/>
+            <a:r>
+              <a:rPr lang="en" dirty="0" err="1">
+                <a:latin typeface="+mj-lt"/>
+                <a:ea typeface="Open Sans" panose="020B0606030504020204" pitchFamily="34" charset="0"/>
+                <a:cs typeface="Open Sans" panose="020B0606030504020204" pitchFamily="34" charset="0"/>
+              </a:rPr>
+              <a:t>mNGS</a:t>
+            </a:r>
+            <a:r>
+              <a:rPr lang="en" dirty="0">
+                <a:latin typeface="+mj-lt"/>
+                <a:ea typeface="Open Sans" panose="020B0606030504020204" pitchFamily="34" charset="0"/>
+                <a:cs typeface="Open Sans" panose="020B0606030504020204" pitchFamily="34" charset="0"/>
+              </a:rPr>
+              <a:t> Analysis Highlights</a:t>
+            </a:r>
+            <a:endParaRPr dirty="0">
+              <a:latin typeface="+mj-lt"/>
+              <a:ea typeface="Open Sans" panose="020B0606030504020204" pitchFamily="34" charset="0"/>
+              <a:cs typeface="Open Sans" panose="020B0606030504020204" pitchFamily="34" charset="0"/>
+            </a:endParaRPr>
           </a:p>
         </p:txBody>
       </p:sp>
@@ -26434,7 +29515,7 @@
           </a:bodyPr>
           <a:lstStyle/>
           <a:p>
-            <a:pPr marL="457200" lvl="0" indent="-342900" algn="l" rtl="0">
+            <a:pPr marL="114300" lvl="0" indent="0" algn="l" rtl="0">
               <a:lnSpc>
                 <a:spcPct val="200000"/>
               </a:lnSpc>
@@ -26445,13 +29526,21 @@
                 <a:spcPts val="0"/>
               </a:spcAft>
               <a:buSzPts val="1800"/>
-              <a:buChar char="●"/>
+              <a:buNone/>
             </a:pPr>
             <a:r>
-              <a:rPr lang="en"/>
+              <a:rPr lang="en" dirty="0">
+                <a:solidFill>
+                  <a:schemeClr val="tx1"/>
+                </a:solidFill>
+              </a:rPr>
               <a:t>With just a few clicks, easily:</a:t>
             </a:r>
-            <a:endParaRPr/>
+            <a:endParaRPr dirty="0">
+              <a:solidFill>
+                <a:schemeClr val="tx1"/>
+              </a:solidFill>
+            </a:endParaRPr>
           </a:p>
           <a:p>
             <a:pPr marL="914400" lvl="1" indent="-323850" algn="l" rtl="0">
@@ -26468,10 +29557,18 @@
               <a:buChar char="○"/>
             </a:pPr>
             <a:r>
-              <a:rPr lang="en" sz="1500"/>
+              <a:rPr lang="en" sz="1500" dirty="0">
+                <a:solidFill>
+                  <a:schemeClr val="tx1"/>
+                </a:solidFill>
+              </a:rPr>
               <a:t>Evaluate sample quality</a:t>
             </a:r>
-            <a:endParaRPr sz="1500"/>
+            <a:endParaRPr sz="1500" dirty="0">
+              <a:solidFill>
+                <a:schemeClr val="tx1"/>
+              </a:solidFill>
+            </a:endParaRPr>
           </a:p>
           <a:p>
             <a:pPr marL="914400" lvl="1" indent="-323850" algn="l" rtl="0">
@@ -26488,10 +29585,18 @@
               <a:buChar char="○"/>
             </a:pPr>
             <a:r>
-              <a:rPr lang="en" sz="1500"/>
+              <a:rPr lang="en" sz="1500" dirty="0">
+                <a:solidFill>
+                  <a:schemeClr val="tx1"/>
+                </a:solidFill>
+              </a:rPr>
               <a:t>Explore and evaluate identified taxa through interactive reports</a:t>
             </a:r>
-            <a:endParaRPr sz="1500"/>
+            <a:endParaRPr sz="1500" dirty="0">
+              <a:solidFill>
+                <a:schemeClr val="tx1"/>
+              </a:solidFill>
+            </a:endParaRPr>
           </a:p>
           <a:p>
             <a:pPr marL="914400" lvl="1" indent="-323850" algn="l" rtl="0">
@@ -26508,10 +29613,18 @@
               <a:buChar char="○"/>
             </a:pPr>
             <a:r>
-              <a:rPr lang="en" sz="1500"/>
+              <a:rPr lang="en" sz="1500" dirty="0">
+                <a:solidFill>
+                  <a:schemeClr val="tx1"/>
+                </a:solidFill>
+              </a:rPr>
               <a:t>Compare samples using interactive heatmaps</a:t>
             </a:r>
-            <a:endParaRPr sz="1500"/>
+            <a:endParaRPr sz="1500" dirty="0">
+              <a:solidFill>
+                <a:schemeClr val="tx1"/>
+              </a:solidFill>
+            </a:endParaRPr>
           </a:p>
           <a:p>
             <a:pPr marL="914400" lvl="1" indent="-323850" algn="l" rtl="0">
@@ -26528,10 +29641,18 @@
               <a:buChar char="○"/>
             </a:pPr>
             <a:r>
-              <a:rPr lang="en" sz="1500"/>
+              <a:rPr lang="en" sz="1500" dirty="0">
+                <a:solidFill>
+                  <a:schemeClr val="tx1"/>
+                </a:solidFill>
+              </a:rPr>
               <a:t>Generate viral consensus genomes</a:t>
             </a:r>
-            <a:endParaRPr sz="1500"/>
+            <a:endParaRPr sz="1500" dirty="0">
+              <a:solidFill>
+                <a:schemeClr val="tx1"/>
+              </a:solidFill>
+            </a:endParaRPr>
           </a:p>
           <a:p>
             <a:pPr marL="914400" lvl="1" indent="-323850" algn="l" rtl="0">
@@ -26548,250 +29669,21 @@
               <a:buChar char="○"/>
             </a:pPr>
             <a:r>
-              <a:rPr lang="en" sz="1500"/>
+              <a:rPr lang="en" sz="1500" dirty="0">
+                <a:solidFill>
+                  <a:schemeClr val="tx1"/>
+                </a:solidFill>
+              </a:rPr>
               <a:t>Keep track of pipeline steps </a:t>
             </a:r>
-            <a:endParaRPr sz="1500"/>
-          </a:p>
-        </p:txBody>
-      </p:sp>
-    </p:spTree>
-  </p:cSld>
-  <p:clrMapOvr>
-    <a:masterClrMapping/>
-  </p:clrMapOvr>
-</p:sld>
-</file>
-
-<file path=ppt/slides/slide8.xml><?xml version="1.0" encoding="utf-8"?>
-<p:sld xmlns:a="http://schemas.openxmlformats.org/drawingml/2006/main" xmlns:r="http://schemas.openxmlformats.org/officeDocument/2006/relationships" xmlns:p="http://schemas.openxmlformats.org/presentationml/2006/main">
-  <p:cSld>
-    <p:spTree>
-      <p:nvGrpSpPr>
-        <p:cNvPr id="1" name="Shape 183"/>
-        <p:cNvGrpSpPr/>
-        <p:nvPr/>
-      </p:nvGrpSpPr>
-      <p:grpSpPr>
-        <a:xfrm>
-          <a:off x="0" y="0"/>
-          <a:ext cx="0" cy="0"/>
-          <a:chOff x="0" y="0"/>
-          <a:chExt cx="0" cy="0"/>
-        </a:xfrm>
-      </p:grpSpPr>
-      <p:sp>
-        <p:nvSpPr>
-          <p:cNvPr id="184" name="Google Shape;184;p8"/>
-          <p:cNvSpPr txBox="1">
-            <a:spLocks noGrp="1"/>
-          </p:cNvSpPr>
-          <p:nvPr>
-            <p:ph type="title" idx="4294967295"/>
-          </p:nvPr>
-        </p:nvSpPr>
-        <p:spPr>
-          <a:xfrm>
-            <a:off x="342900" y="259225"/>
-            <a:ext cx="8392800" cy="726600"/>
-          </a:xfrm>
-          <a:prstGeom prst="rect">
-            <a:avLst/>
-          </a:prstGeom>
-          <a:noFill/>
-          <a:ln>
-            <a:noFill/>
-          </a:ln>
-        </p:spPr>
-        <p:txBody>
-          <a:bodyPr spcFirstLastPara="1" wrap="square" lIns="68575" tIns="34275" rIns="68575" bIns="34275" anchor="ctr" anchorCtr="0">
-            <a:noAutofit/>
-          </a:bodyPr>
-          <a:lstStyle/>
-          <a:p>
-            <a:pPr marL="0" lvl="0" indent="0" algn="ctr" rtl="0">
-              <a:lnSpc>
-                <a:spcPct val="90000"/>
-              </a:lnSpc>
-              <a:spcBef>
-                <a:spcPts val="0"/>
-              </a:spcBef>
-              <a:spcAft>
-                <a:spcPts val="0"/>
-              </a:spcAft>
-              <a:buSzPts val="3300"/>
-              <a:buNone/>
-            </a:pPr>
-            <a:r>
-              <a:rPr lang="en" sz="2400">
-                <a:latin typeface="Open Sans"/>
-                <a:ea typeface="Open Sans"/>
-                <a:cs typeface="Open Sans"/>
-                <a:sym typeface="Open Sans"/>
-              </a:rPr>
-              <a:t>Perform QC</a:t>
-            </a:r>
-            <a:endParaRPr sz="2400">
-              <a:latin typeface="Open Sans"/>
-              <a:ea typeface="Open Sans"/>
-              <a:cs typeface="Open Sans"/>
-              <a:sym typeface="Open Sans"/>
+            <a:endParaRPr sz="1500" dirty="0">
+              <a:solidFill>
+                <a:schemeClr val="tx1"/>
+              </a:solidFill>
             </a:endParaRPr>
           </a:p>
         </p:txBody>
       </p:sp>
-      <p:pic>
-        <p:nvPicPr>
-          <p:cNvPr id="185" name="Google Shape;185;p8"/>
-          <p:cNvPicPr preferRelativeResize="0"/>
-          <p:nvPr/>
-        </p:nvPicPr>
-        <p:blipFill rotWithShape="1">
-          <a:blip r:embed="rId3">
-            <a:alphaModFix/>
-          </a:blip>
-          <a:srcRect l="2771" t="22630" r="4213"/>
-          <a:stretch/>
-        </p:blipFill>
-        <p:spPr>
-          <a:xfrm>
-            <a:off x="924925" y="1367175"/>
-            <a:ext cx="7202499" cy="3007076"/>
-          </a:xfrm>
-          <a:prstGeom prst="rect">
-            <a:avLst/>
-          </a:prstGeom>
-          <a:noFill/>
-          <a:ln>
-            <a:noFill/>
-          </a:ln>
-          <a:effectLst>
-            <a:outerShdw blurRad="57150" dist="19050" dir="5400000" algn="bl" rotWithShape="0">
-              <a:srgbClr val="000000">
-                <a:alpha val="49019"/>
-              </a:srgbClr>
-            </a:outerShdw>
-          </a:effectLst>
-        </p:spPr>
-      </p:pic>
-    </p:spTree>
-  </p:cSld>
-  <p:clrMapOvr>
-    <a:masterClrMapping/>
-  </p:clrMapOvr>
-</p:sld>
-</file>
-
-<file path=ppt/slides/slide9.xml><?xml version="1.0" encoding="utf-8"?>
-<p:sld xmlns:a="http://schemas.openxmlformats.org/drawingml/2006/main" xmlns:r="http://schemas.openxmlformats.org/officeDocument/2006/relationships" xmlns:p="http://schemas.openxmlformats.org/presentationml/2006/main">
-  <p:cSld>
-    <p:spTree>
-      <p:nvGrpSpPr>
-        <p:cNvPr id="1" name="Shape 189"/>
-        <p:cNvGrpSpPr/>
-        <p:nvPr/>
-      </p:nvGrpSpPr>
-      <p:grpSpPr>
-        <a:xfrm>
-          <a:off x="0" y="0"/>
-          <a:ext cx="0" cy="0"/>
-          <a:chOff x="0" y="0"/>
-          <a:chExt cx="0" cy="0"/>
-        </a:xfrm>
-      </p:grpSpPr>
-      <p:sp>
-        <p:nvSpPr>
-          <p:cNvPr id="190" name="Google Shape;190;p9"/>
-          <p:cNvSpPr txBox="1">
-            <a:spLocks noGrp="1"/>
-          </p:cNvSpPr>
-          <p:nvPr>
-            <p:ph type="title" idx="4294967295"/>
-          </p:nvPr>
-        </p:nvSpPr>
-        <p:spPr>
-          <a:xfrm>
-            <a:off x="342899" y="254235"/>
-            <a:ext cx="8479800" cy="690000"/>
-          </a:xfrm>
-          <a:prstGeom prst="rect">
-            <a:avLst/>
-          </a:prstGeom>
-          <a:noFill/>
-          <a:ln>
-            <a:noFill/>
-          </a:ln>
-        </p:spPr>
-        <p:txBody>
-          <a:bodyPr spcFirstLastPara="1" wrap="square" lIns="68575" tIns="34275" rIns="68575" bIns="34275" anchor="ctr" anchorCtr="0">
-            <a:noAutofit/>
-          </a:bodyPr>
-          <a:lstStyle/>
-          <a:p>
-            <a:pPr marL="0" lvl="0" indent="0" algn="ctr" rtl="0">
-              <a:lnSpc>
-                <a:spcPct val="90000"/>
-              </a:lnSpc>
-              <a:spcBef>
-                <a:spcPts val="0"/>
-              </a:spcBef>
-              <a:spcAft>
-                <a:spcPts val="0"/>
-              </a:spcAft>
-              <a:buSzPts val="3300"/>
-              <a:buNone/>
-            </a:pPr>
-            <a:r>
-              <a:rPr lang="en" sz="2400">
-                <a:latin typeface="Open Sans"/>
-                <a:ea typeface="Open Sans"/>
-                <a:cs typeface="Open Sans"/>
-                <a:sym typeface="Open Sans"/>
-              </a:rPr>
-              <a:t>Explore and evaluate metrics for detected microbes</a:t>
-            </a:r>
-            <a:endParaRPr sz="2400">
-              <a:latin typeface="Open Sans"/>
-              <a:ea typeface="Open Sans"/>
-              <a:cs typeface="Open Sans"/>
-              <a:sym typeface="Open Sans"/>
-            </a:endParaRPr>
-          </a:p>
-        </p:txBody>
-      </p:sp>
-      <p:pic>
-        <p:nvPicPr>
-          <p:cNvPr id="191" name="Google Shape;191;p9"/>
-          <p:cNvPicPr preferRelativeResize="0"/>
-          <p:nvPr/>
-        </p:nvPicPr>
-        <p:blipFill rotWithShape="1">
-          <a:blip r:embed="rId3">
-            <a:alphaModFix/>
-          </a:blip>
-          <a:srcRect t="1758"/>
-          <a:stretch/>
-        </p:blipFill>
-        <p:spPr>
-          <a:xfrm>
-            <a:off x="152400" y="1158200"/>
-            <a:ext cx="8839199" cy="3443051"/>
-          </a:xfrm>
-          <a:prstGeom prst="rect">
-            <a:avLst/>
-          </a:prstGeom>
-          <a:noFill/>
-          <a:ln w="9525" cap="flat" cmpd="sng">
-            <a:solidFill>
-              <a:schemeClr val="dk2"/>
-            </a:solidFill>
-            <a:prstDash val="solid"/>
-            <a:round/>
-            <a:headEnd type="none" w="sm" len="sm"/>
-            <a:tailEnd type="none" w="sm" len="sm"/>
-          </a:ln>
-        </p:spPr>
-      </p:pic>
     </p:spTree>
   </p:cSld>
   <p:clrMapOvr>
